--- a/CSTA-Robo_Bharat-Level2-Hackathon-2026-SriKumaranPublicSchool.pptx
+++ b/CSTA-Robo_Bharat-Level2-Hackathon-2026-SriKumaranPublicSchool.pptx
@@ -5,7 +5,7 @@
     <p:sldMasterId id="2147483648" r:id="rId1"/>
   </p:sldMasterIdLst>
   <p:notesMasterIdLst>
-    <p:notesMasterId r:id="rId13"/>
+    <p:notesMasterId r:id="rId14"/>
   </p:notesMasterIdLst>
   <p:sldIdLst>
     <p:sldId id="258" r:id="rId2"/>
@@ -13,20 +13,21 @@
     <p:sldId id="260" r:id="rId4"/>
     <p:sldId id="261" r:id="rId5"/>
     <p:sldId id="265" r:id="rId6"/>
-    <p:sldId id="268" r:id="rId7"/>
-    <p:sldId id="270" r:id="rId8"/>
-    <p:sldId id="271" r:id="rId9"/>
-    <p:sldId id="262" r:id="rId10"/>
-    <p:sldId id="264" r:id="rId11"/>
-    <p:sldId id="263" r:id="rId12"/>
+    <p:sldId id="263" r:id="rId7"/>
+    <p:sldId id="268" r:id="rId8"/>
+    <p:sldId id="270" r:id="rId9"/>
+    <p:sldId id="271" r:id="rId10"/>
+    <p:sldId id="262" r:id="rId11"/>
+    <p:sldId id="264" r:id="rId12"/>
+    <p:sldId id="272" r:id="rId13"/>
   </p:sldIdLst>
   <p:sldSz cx="12192000" cy="6858000"/>
   <p:notesSz cx="6858000" cy="9144000"/>
   <p:embeddedFontLst>
     <p:embeddedFont>
       <p:font typeface="Play" panose="020B0604020202020204" charset="0"/>
-      <p:regular r:id="rId14"/>
-      <p:bold r:id="rId15"/>
+      <p:regular r:id="rId15"/>
+      <p:bold r:id="rId16"/>
     </p:embeddedFont>
   </p:embeddedFontLst>
   <p:defaultTextStyle>
@@ -263,7 +264,7 @@
       <p15:sldGuideLst xmlns:p15="http://schemas.microsoft.com/office/powerpoint/2012/main"/>
     </p:ext>
     <p:ext uri="GoogleSlidesCustomDataVersion2">
-      <go:slidesCustomData xmlns="" xmlns:mc="http://schemas.openxmlformats.org/markup-compatibility/2006" xmlns:mv="urn:schemas-microsoft-com:mac:vml" xmlns:c="http://schemas.openxmlformats.org/drawingml/2006/chart" xmlns:dgm="http://schemas.openxmlformats.org/drawingml/2006/diagram" xmlns:o="urn:schemas-microsoft-com:office:office" xmlns:v="urn:schemas-microsoft-com:vml" xmlns:pvml="urn:schemas-microsoft-com:office:powerpoint" xmlns:com="http://schemas.openxmlformats.org/drawingml/2006/compatibility" xmlns:p14="http://schemas.microsoft.com/office/powerpoint/2010/main" xmlns:p15="http://schemas.microsoft.com/office/powerpoint/2012/main" xmlns:ahyp="http://schemas.microsoft.com/office/drawing/2018/hyperlinkcolor" xmlns:go="http://customooxmlschemas.google.com/" r:id="rId16" roundtripDataSignature="AMtx7mjj5ZqYK+Ja1XPXk/Sq/Ed8fNPNlQ=="/>
+      <go:slidesCustomData xmlns:go="http://customooxmlschemas.google.com/" xmlns:ahyp="http://schemas.microsoft.com/office/drawing/2018/hyperlinkcolor" xmlns:p15="http://schemas.microsoft.com/office/powerpoint/2012/main" xmlns:p14="http://schemas.microsoft.com/office/powerpoint/2010/main" xmlns:com="http://schemas.openxmlformats.org/drawingml/2006/compatibility" xmlns:pvml="urn:schemas-microsoft-com:office:powerpoint" xmlns:v="urn:schemas-microsoft-com:vml" xmlns:o="urn:schemas-microsoft-com:office:office" xmlns:dgm="http://schemas.openxmlformats.org/drawingml/2006/diagram" xmlns:c="http://schemas.openxmlformats.org/drawingml/2006/chart" xmlns:mv="urn:schemas-microsoft-com:mac:vml" xmlns:mc="http://schemas.openxmlformats.org/markup-compatibility/2006" xmlns="" r:id="rId17" roundtripDataSignature="AMtx7mjj5ZqYK+Ja1XPXk/Sq/Ed8fNPNlQ=="/>
     </p:ext>
   </p:extLst>
 </p:presentation>
@@ -2087,6 +2088,117 @@
   <p:cSld>
     <p:spTree>
       <p:nvGrpSpPr>
+        <p:cNvPr id="1" name="Shape 225"/>
+        <p:cNvGrpSpPr/>
+        <p:nvPr/>
+      </p:nvGrpSpPr>
+      <p:grpSpPr>
+        <a:xfrm>
+          <a:off x="0" y="0"/>
+          <a:ext cx="0" cy="0"/>
+          <a:chOff x="0" y="0"/>
+          <a:chExt cx="0" cy="0"/>
+        </a:xfrm>
+      </p:grpSpPr>
+      <p:sp>
+        <p:nvSpPr>
+          <p:cNvPr id="226" name="Google Shape;226;p8:notes"/>
+          <p:cNvSpPr txBox="1">
+            <a:spLocks noGrp="1"/>
+          </p:cNvSpPr>
+          <p:nvPr>
+            <p:ph type="body" idx="1"/>
+          </p:nvPr>
+        </p:nvSpPr>
+        <p:spPr>
+          <a:xfrm>
+            <a:off x="685800" y="4400550"/>
+            <a:ext cx="5486400" cy="3600450"/>
+          </a:xfrm>
+          <a:prstGeom prst="rect">
+            <a:avLst/>
+          </a:prstGeom>
+        </p:spPr>
+        <p:txBody>
+          <a:bodyPr spcFirstLastPara="1" wrap="square" lIns="91425" tIns="45700" rIns="91425" bIns="45700" anchor="t" anchorCtr="0">
+            <a:noAutofit/>
+          </a:bodyPr>
+          <a:lstStyle/>
+          <a:p>
+            <a:pPr marL="0" lvl="0" indent="0" algn="l" rtl="0">
+              <a:spcBef>
+                <a:spcPts val="0"/>
+              </a:spcBef>
+              <a:spcAft>
+                <a:spcPts val="0"/>
+              </a:spcAft>
+              <a:buNone/>
+            </a:pPr>
+            <a:endParaRPr/>
+          </a:p>
+        </p:txBody>
+      </p:sp>
+      <p:sp>
+        <p:nvSpPr>
+          <p:cNvPr id="227" name="Google Shape;227;p8:notes"/>
+          <p:cNvSpPr>
+            <a:spLocks noGrp="1" noRot="1" noChangeAspect="1"/>
+          </p:cNvSpPr>
+          <p:nvPr>
+            <p:ph type="sldImg" idx="2"/>
+          </p:nvPr>
+        </p:nvSpPr>
+        <p:spPr>
+          <a:xfrm>
+            <a:off x="685800" y="1143000"/>
+            <a:ext cx="5486400" cy="3086100"/>
+          </a:xfrm>
+          <a:custGeom>
+            <a:avLst/>
+            <a:gdLst/>
+            <a:ahLst/>
+            <a:cxnLst/>
+            <a:rect l="l" t="t" r="r" b="b"/>
+            <a:pathLst>
+              <a:path w="120000" h="120000" extrusionOk="0">
+                <a:moveTo>
+                  <a:pt x="0" y="0"/>
+                </a:moveTo>
+                <a:lnTo>
+                  <a:pt x="120000" y="0"/>
+                </a:lnTo>
+                <a:lnTo>
+                  <a:pt x="120000" y="120000"/>
+                </a:lnTo>
+                <a:lnTo>
+                  <a:pt x="0" y="120000"/>
+                </a:lnTo>
+                <a:close/>
+              </a:path>
+            </a:pathLst>
+          </a:custGeom>
+        </p:spPr>
+        <p:txBody>
+          <a:bodyPr/>
+          <a:lstStyle/>
+          <a:p>
+            <a:endParaRPr lang="en-IN"/>
+          </a:p>
+        </p:txBody>
+      </p:sp>
+    </p:spTree>
+  </p:cSld>
+  <p:clrMapOvr>
+    <a:masterClrMapping/>
+  </p:clrMapOvr>
+</p:notes>
+</file>
+
+<file path=ppt/notesSlides/notesSlide7.xml><?xml version="1.0" encoding="utf-8"?>
+<p:notes xmlns:a="http://schemas.openxmlformats.org/drawingml/2006/main" xmlns:r="http://schemas.openxmlformats.org/officeDocument/2006/relationships" xmlns:p="http://schemas.openxmlformats.org/presentationml/2006/main" showMasterSp="0" showMasterPhAnim="0">
+  <p:cSld>
+    <p:spTree>
+      <p:nvGrpSpPr>
         <p:cNvPr id="1" name="Shape 186"/>
         <p:cNvGrpSpPr/>
         <p:nvPr/>
@@ -2193,12 +2305,18 @@
 </p:notes>
 </file>
 
-<file path=ppt/notesSlides/notesSlide7.xml><?xml version="1.0" encoding="utf-8"?>
+<file path=ppt/notesSlides/notesSlide8.xml><?xml version="1.0" encoding="utf-8"?>
 <p:notes xmlns:a="http://schemas.openxmlformats.org/drawingml/2006/main" xmlns:r="http://schemas.openxmlformats.org/officeDocument/2006/relationships" xmlns:p="http://schemas.openxmlformats.org/presentationml/2006/main" showMasterSp="0" showMasterPhAnim="0">
   <p:cSld>
     <p:spTree>
       <p:nvGrpSpPr>
-        <p:cNvPr id="1" name="Shape 225"/>
+        <p:cNvPr id="1" name="Shape 225">
+          <a:extLst>
+            <a:ext uri="{FF2B5EF4-FFF2-40B4-BE49-F238E27FC236}">
+              <a16:creationId xmlns:a16="http://schemas.microsoft.com/office/drawing/2014/main" id="{0B4DEC02-C0B9-A8BD-33C6-C84F2A3FAAD0}"/>
+            </a:ext>
+          </a:extLst>
+        </p:cNvPr>
         <p:cNvGrpSpPr/>
         <p:nvPr/>
       </p:nvGrpSpPr>
@@ -2212,7 +2330,13 @@
       </p:grpSpPr>
       <p:sp>
         <p:nvSpPr>
-          <p:cNvPr id="226" name="Google Shape;226;p8:notes"/>
+          <p:cNvPr id="226" name="Google Shape;226;p8:notes">
+            <a:extLst>
+              <a:ext uri="{FF2B5EF4-FFF2-40B4-BE49-F238E27FC236}">
+                <a16:creationId xmlns:a16="http://schemas.microsoft.com/office/drawing/2014/main" id="{C495BFA7-B14F-C037-3922-0234989D60E0}"/>
+              </a:ext>
+            </a:extLst>
+          </p:cNvPr>
           <p:cNvSpPr txBox="1">
             <a:spLocks noGrp="1"/>
           </p:cNvSpPr>
@@ -2250,7 +2374,13 @@
       </p:sp>
       <p:sp>
         <p:nvSpPr>
-          <p:cNvPr id="227" name="Google Shape;227;p8:notes"/>
+          <p:cNvPr id="227" name="Google Shape;227;p8:notes">
+            <a:extLst>
+              <a:ext uri="{FF2B5EF4-FFF2-40B4-BE49-F238E27FC236}">
+                <a16:creationId xmlns:a16="http://schemas.microsoft.com/office/drawing/2014/main" id="{CBC8764C-D747-C224-E47D-8B24CEFDC09D}"/>
+              </a:ext>
+            </a:extLst>
+          </p:cNvPr>
           <p:cNvSpPr>
             <a:spLocks noGrp="1" noRot="1" noChangeAspect="1"/>
           </p:cNvSpPr>
@@ -2297,6 +2427,11 @@
         </p:txBody>
       </p:sp>
     </p:spTree>
+    <p:extLst>
+      <p:ext uri="{BB962C8B-B14F-4D97-AF65-F5344CB8AC3E}">
+        <p14:creationId xmlns:p14="http://schemas.microsoft.com/office/powerpoint/2010/main" val="1832845858"/>
+      </p:ext>
+    </p:extLst>
   </p:cSld>
   <p:clrMapOvr>
     <a:masterClrMapping/>
@@ -3032,921 +3167,6 @@
 </file>
 
 <file path=ppt/slideLayouts/slideLayout2.xml><?xml version="1.0" encoding="utf-8"?>
-<p:sldLayout xmlns:a="http://schemas.openxmlformats.org/drawingml/2006/main" xmlns:r="http://schemas.openxmlformats.org/officeDocument/2006/relationships" xmlns:p="http://schemas.openxmlformats.org/presentationml/2006/main" matchingName="Content with Caption" type="objTx">
-  <p:cSld name="OBJECT_WITH_CAPTION_TEXT">
-    <p:spTree>
-      <p:nvGrpSpPr>
-        <p:cNvPr id="1" name="Shape 58"/>
-        <p:cNvGrpSpPr/>
-        <p:nvPr/>
-      </p:nvGrpSpPr>
-      <p:grpSpPr>
-        <a:xfrm>
-          <a:off x="0" y="0"/>
-          <a:ext cx="0" cy="0"/>
-          <a:chOff x="0" y="0"/>
-          <a:chExt cx="0" cy="0"/>
-        </a:xfrm>
-      </p:grpSpPr>
-      <p:sp>
-        <p:nvSpPr>
-          <p:cNvPr id="59" name="Google Shape;59;p17"/>
-          <p:cNvSpPr txBox="1">
-            <a:spLocks noGrp="1"/>
-          </p:cNvSpPr>
-          <p:nvPr>
-            <p:ph type="title"/>
-          </p:nvPr>
-        </p:nvSpPr>
-        <p:spPr>
-          <a:xfrm>
-            <a:off x="839788" y="457200"/>
-            <a:ext cx="3932237" cy="1600200"/>
-          </a:xfrm>
-          <a:prstGeom prst="rect">
-            <a:avLst/>
-          </a:prstGeom>
-          <a:noFill/>
-          <a:ln>
-            <a:noFill/>
-          </a:ln>
-        </p:spPr>
-        <p:txBody>
-          <a:bodyPr spcFirstLastPara="1" wrap="square" lIns="91425" tIns="45700" rIns="91425" bIns="45700" anchor="b" anchorCtr="0">
-            <a:normAutofit/>
-          </a:bodyPr>
-          <a:lstStyle>
-            <a:lvl1pPr lvl="0" algn="l">
-              <a:lnSpc>
-                <a:spcPct val="90000"/>
-              </a:lnSpc>
-              <a:spcBef>
-                <a:spcPts val="0"/>
-              </a:spcBef>
-              <a:spcAft>
-                <a:spcPts val="0"/>
-              </a:spcAft>
-              <a:buClr>
-                <a:schemeClr val="dk1"/>
-              </a:buClr>
-              <a:buSzPts val="3200"/>
-              <a:buFont typeface="Play"/>
-              <a:buNone/>
-              <a:defRPr sz="3200"/>
-            </a:lvl1pPr>
-            <a:lvl2pPr lvl="1">
-              <a:spcBef>
-                <a:spcPts val="0"/>
-              </a:spcBef>
-              <a:spcAft>
-                <a:spcPts val="0"/>
-              </a:spcAft>
-              <a:buSzPts val="1400"/>
-              <a:buNone/>
-              <a:defRPr/>
-            </a:lvl2pPr>
-            <a:lvl3pPr lvl="2">
-              <a:spcBef>
-                <a:spcPts val="0"/>
-              </a:spcBef>
-              <a:spcAft>
-                <a:spcPts val="0"/>
-              </a:spcAft>
-              <a:buSzPts val="1400"/>
-              <a:buNone/>
-              <a:defRPr/>
-            </a:lvl3pPr>
-            <a:lvl4pPr lvl="3">
-              <a:spcBef>
-                <a:spcPts val="0"/>
-              </a:spcBef>
-              <a:spcAft>
-                <a:spcPts val="0"/>
-              </a:spcAft>
-              <a:buSzPts val="1400"/>
-              <a:buNone/>
-              <a:defRPr/>
-            </a:lvl4pPr>
-            <a:lvl5pPr lvl="4">
-              <a:spcBef>
-                <a:spcPts val="0"/>
-              </a:spcBef>
-              <a:spcAft>
-                <a:spcPts val="0"/>
-              </a:spcAft>
-              <a:buSzPts val="1400"/>
-              <a:buNone/>
-              <a:defRPr/>
-            </a:lvl5pPr>
-            <a:lvl6pPr lvl="5">
-              <a:spcBef>
-                <a:spcPts val="0"/>
-              </a:spcBef>
-              <a:spcAft>
-                <a:spcPts val="0"/>
-              </a:spcAft>
-              <a:buSzPts val="1400"/>
-              <a:buNone/>
-              <a:defRPr/>
-            </a:lvl6pPr>
-            <a:lvl7pPr lvl="6">
-              <a:spcBef>
-                <a:spcPts val="0"/>
-              </a:spcBef>
-              <a:spcAft>
-                <a:spcPts val="0"/>
-              </a:spcAft>
-              <a:buSzPts val="1400"/>
-              <a:buNone/>
-              <a:defRPr/>
-            </a:lvl7pPr>
-            <a:lvl8pPr lvl="7">
-              <a:spcBef>
-                <a:spcPts val="0"/>
-              </a:spcBef>
-              <a:spcAft>
-                <a:spcPts val="0"/>
-              </a:spcAft>
-              <a:buSzPts val="1400"/>
-              <a:buNone/>
-              <a:defRPr/>
-            </a:lvl8pPr>
-            <a:lvl9pPr lvl="8">
-              <a:spcBef>
-                <a:spcPts val="0"/>
-              </a:spcBef>
-              <a:spcAft>
-                <a:spcPts val="0"/>
-              </a:spcAft>
-              <a:buSzPts val="1400"/>
-              <a:buNone/>
-              <a:defRPr/>
-            </a:lvl9pPr>
-          </a:lstStyle>
-          <a:p>
-            <a:endParaRPr/>
-          </a:p>
-        </p:txBody>
-      </p:sp>
-      <p:sp>
-        <p:nvSpPr>
-          <p:cNvPr id="60" name="Google Shape;60;p17"/>
-          <p:cNvSpPr txBox="1">
-            <a:spLocks noGrp="1"/>
-          </p:cNvSpPr>
-          <p:nvPr>
-            <p:ph type="body" idx="1"/>
-          </p:nvPr>
-        </p:nvSpPr>
-        <p:spPr>
-          <a:xfrm>
-            <a:off x="5183188" y="987425"/>
-            <a:ext cx="6172200" cy="4873625"/>
-          </a:xfrm>
-          <a:prstGeom prst="rect">
-            <a:avLst/>
-          </a:prstGeom>
-          <a:noFill/>
-          <a:ln>
-            <a:noFill/>
-          </a:ln>
-        </p:spPr>
-        <p:txBody>
-          <a:bodyPr spcFirstLastPara="1" wrap="square" lIns="91425" tIns="45700" rIns="91425" bIns="45700" anchor="t" anchorCtr="0">
-            <a:normAutofit/>
-          </a:bodyPr>
-          <a:lstStyle>
-            <a:lvl1pPr marL="457200" lvl="0" indent="-431800" algn="l">
-              <a:lnSpc>
-                <a:spcPct val="90000"/>
-              </a:lnSpc>
-              <a:spcBef>
-                <a:spcPts val="1000"/>
-              </a:spcBef>
-              <a:spcAft>
-                <a:spcPts val="0"/>
-              </a:spcAft>
-              <a:buClr>
-                <a:schemeClr val="dk1"/>
-              </a:buClr>
-              <a:buSzPts val="3200"/>
-              <a:buChar char="•"/>
-              <a:defRPr sz="3200"/>
-            </a:lvl1pPr>
-            <a:lvl2pPr marL="914400" lvl="1" indent="-406400" algn="l">
-              <a:lnSpc>
-                <a:spcPct val="90000"/>
-              </a:lnSpc>
-              <a:spcBef>
-                <a:spcPts val="500"/>
-              </a:spcBef>
-              <a:spcAft>
-                <a:spcPts val="0"/>
-              </a:spcAft>
-              <a:buClr>
-                <a:schemeClr val="dk1"/>
-              </a:buClr>
-              <a:buSzPts val="2800"/>
-              <a:buChar char="•"/>
-              <a:defRPr sz="2800"/>
-            </a:lvl2pPr>
-            <a:lvl3pPr marL="1371600" lvl="2" indent="-381000" algn="l">
-              <a:lnSpc>
-                <a:spcPct val="90000"/>
-              </a:lnSpc>
-              <a:spcBef>
-                <a:spcPts val="500"/>
-              </a:spcBef>
-              <a:spcAft>
-                <a:spcPts val="0"/>
-              </a:spcAft>
-              <a:buClr>
-                <a:schemeClr val="dk1"/>
-              </a:buClr>
-              <a:buSzPts val="2400"/>
-              <a:buChar char="•"/>
-              <a:defRPr sz="2400"/>
-            </a:lvl3pPr>
-            <a:lvl4pPr marL="1828800" lvl="3" indent="-355600" algn="l">
-              <a:lnSpc>
-                <a:spcPct val="90000"/>
-              </a:lnSpc>
-              <a:spcBef>
-                <a:spcPts val="500"/>
-              </a:spcBef>
-              <a:spcAft>
-                <a:spcPts val="0"/>
-              </a:spcAft>
-              <a:buClr>
-                <a:schemeClr val="dk1"/>
-              </a:buClr>
-              <a:buSzPts val="2000"/>
-              <a:buChar char="•"/>
-              <a:defRPr sz="2000"/>
-            </a:lvl4pPr>
-            <a:lvl5pPr marL="2286000" lvl="4" indent="-355600" algn="l">
-              <a:lnSpc>
-                <a:spcPct val="90000"/>
-              </a:lnSpc>
-              <a:spcBef>
-                <a:spcPts val="500"/>
-              </a:spcBef>
-              <a:spcAft>
-                <a:spcPts val="0"/>
-              </a:spcAft>
-              <a:buClr>
-                <a:schemeClr val="dk1"/>
-              </a:buClr>
-              <a:buSzPts val="2000"/>
-              <a:buChar char="•"/>
-              <a:defRPr sz="2000"/>
-            </a:lvl5pPr>
-            <a:lvl6pPr marL="2743200" lvl="5" indent="-355600" algn="l">
-              <a:lnSpc>
-                <a:spcPct val="90000"/>
-              </a:lnSpc>
-              <a:spcBef>
-                <a:spcPts val="500"/>
-              </a:spcBef>
-              <a:spcAft>
-                <a:spcPts val="0"/>
-              </a:spcAft>
-              <a:buClr>
-                <a:schemeClr val="dk1"/>
-              </a:buClr>
-              <a:buSzPts val="2000"/>
-              <a:buChar char="•"/>
-              <a:defRPr sz="2000"/>
-            </a:lvl6pPr>
-            <a:lvl7pPr marL="3200400" lvl="6" indent="-355600" algn="l">
-              <a:lnSpc>
-                <a:spcPct val="90000"/>
-              </a:lnSpc>
-              <a:spcBef>
-                <a:spcPts val="500"/>
-              </a:spcBef>
-              <a:spcAft>
-                <a:spcPts val="0"/>
-              </a:spcAft>
-              <a:buClr>
-                <a:schemeClr val="dk1"/>
-              </a:buClr>
-              <a:buSzPts val="2000"/>
-              <a:buChar char="•"/>
-              <a:defRPr sz="2000"/>
-            </a:lvl7pPr>
-            <a:lvl8pPr marL="3657600" lvl="7" indent="-355600" algn="l">
-              <a:lnSpc>
-                <a:spcPct val="90000"/>
-              </a:lnSpc>
-              <a:spcBef>
-                <a:spcPts val="500"/>
-              </a:spcBef>
-              <a:spcAft>
-                <a:spcPts val="0"/>
-              </a:spcAft>
-              <a:buClr>
-                <a:schemeClr val="dk1"/>
-              </a:buClr>
-              <a:buSzPts val="2000"/>
-              <a:buChar char="•"/>
-              <a:defRPr sz="2000"/>
-            </a:lvl8pPr>
-            <a:lvl9pPr marL="4114800" lvl="8" indent="-355600" algn="l">
-              <a:lnSpc>
-                <a:spcPct val="90000"/>
-              </a:lnSpc>
-              <a:spcBef>
-                <a:spcPts val="500"/>
-              </a:spcBef>
-              <a:spcAft>
-                <a:spcPts val="0"/>
-              </a:spcAft>
-              <a:buClr>
-                <a:schemeClr val="dk1"/>
-              </a:buClr>
-              <a:buSzPts val="2000"/>
-              <a:buChar char="•"/>
-              <a:defRPr sz="2000"/>
-            </a:lvl9pPr>
-          </a:lstStyle>
-          <a:p>
-            <a:endParaRPr/>
-          </a:p>
-        </p:txBody>
-      </p:sp>
-      <p:sp>
-        <p:nvSpPr>
-          <p:cNvPr id="61" name="Google Shape;61;p17"/>
-          <p:cNvSpPr txBox="1">
-            <a:spLocks noGrp="1"/>
-          </p:cNvSpPr>
-          <p:nvPr>
-            <p:ph type="body" idx="2"/>
-          </p:nvPr>
-        </p:nvSpPr>
-        <p:spPr>
-          <a:xfrm>
-            <a:off x="839788" y="2057400"/>
-            <a:ext cx="3932237" cy="3811588"/>
-          </a:xfrm>
-          <a:prstGeom prst="rect">
-            <a:avLst/>
-          </a:prstGeom>
-          <a:noFill/>
-          <a:ln>
-            <a:noFill/>
-          </a:ln>
-        </p:spPr>
-        <p:txBody>
-          <a:bodyPr spcFirstLastPara="1" wrap="square" lIns="91425" tIns="45700" rIns="91425" bIns="45700" anchor="t" anchorCtr="0">
-            <a:normAutofit/>
-          </a:bodyPr>
-          <a:lstStyle>
-            <a:lvl1pPr marL="457200" lvl="0" indent="-228600" algn="l">
-              <a:lnSpc>
-                <a:spcPct val="90000"/>
-              </a:lnSpc>
-              <a:spcBef>
-                <a:spcPts val="1000"/>
-              </a:spcBef>
-              <a:spcAft>
-                <a:spcPts val="0"/>
-              </a:spcAft>
-              <a:buClr>
-                <a:schemeClr val="dk1"/>
-              </a:buClr>
-              <a:buSzPts val="1600"/>
-              <a:buNone/>
-              <a:defRPr sz="1600"/>
-            </a:lvl1pPr>
-            <a:lvl2pPr marL="914400" lvl="1" indent="-228600" algn="l">
-              <a:lnSpc>
-                <a:spcPct val="90000"/>
-              </a:lnSpc>
-              <a:spcBef>
-                <a:spcPts val="500"/>
-              </a:spcBef>
-              <a:spcAft>
-                <a:spcPts val="0"/>
-              </a:spcAft>
-              <a:buClr>
-                <a:schemeClr val="dk1"/>
-              </a:buClr>
-              <a:buSzPts val="1400"/>
-              <a:buNone/>
-              <a:defRPr sz="1400"/>
-            </a:lvl2pPr>
-            <a:lvl3pPr marL="1371600" lvl="2" indent="-228600" algn="l">
-              <a:lnSpc>
-                <a:spcPct val="90000"/>
-              </a:lnSpc>
-              <a:spcBef>
-                <a:spcPts val="500"/>
-              </a:spcBef>
-              <a:spcAft>
-                <a:spcPts val="0"/>
-              </a:spcAft>
-              <a:buClr>
-                <a:schemeClr val="dk1"/>
-              </a:buClr>
-              <a:buSzPts val="1200"/>
-              <a:buNone/>
-              <a:defRPr sz="1200"/>
-            </a:lvl3pPr>
-            <a:lvl4pPr marL="1828800" lvl="3" indent="-228600" algn="l">
-              <a:lnSpc>
-                <a:spcPct val="90000"/>
-              </a:lnSpc>
-              <a:spcBef>
-                <a:spcPts val="500"/>
-              </a:spcBef>
-              <a:spcAft>
-                <a:spcPts val="0"/>
-              </a:spcAft>
-              <a:buClr>
-                <a:schemeClr val="dk1"/>
-              </a:buClr>
-              <a:buSzPts val="1000"/>
-              <a:buNone/>
-              <a:defRPr sz="1000"/>
-            </a:lvl4pPr>
-            <a:lvl5pPr marL="2286000" lvl="4" indent="-228600" algn="l">
-              <a:lnSpc>
-                <a:spcPct val="90000"/>
-              </a:lnSpc>
-              <a:spcBef>
-                <a:spcPts val="500"/>
-              </a:spcBef>
-              <a:spcAft>
-                <a:spcPts val="0"/>
-              </a:spcAft>
-              <a:buClr>
-                <a:schemeClr val="dk1"/>
-              </a:buClr>
-              <a:buSzPts val="1000"/>
-              <a:buNone/>
-              <a:defRPr sz="1000"/>
-            </a:lvl5pPr>
-            <a:lvl6pPr marL="2743200" lvl="5" indent="-228600" algn="l">
-              <a:lnSpc>
-                <a:spcPct val="90000"/>
-              </a:lnSpc>
-              <a:spcBef>
-                <a:spcPts val="500"/>
-              </a:spcBef>
-              <a:spcAft>
-                <a:spcPts val="0"/>
-              </a:spcAft>
-              <a:buClr>
-                <a:schemeClr val="dk1"/>
-              </a:buClr>
-              <a:buSzPts val="1000"/>
-              <a:buNone/>
-              <a:defRPr sz="1000"/>
-            </a:lvl6pPr>
-            <a:lvl7pPr marL="3200400" lvl="6" indent="-228600" algn="l">
-              <a:lnSpc>
-                <a:spcPct val="90000"/>
-              </a:lnSpc>
-              <a:spcBef>
-                <a:spcPts val="500"/>
-              </a:spcBef>
-              <a:spcAft>
-                <a:spcPts val="0"/>
-              </a:spcAft>
-              <a:buClr>
-                <a:schemeClr val="dk1"/>
-              </a:buClr>
-              <a:buSzPts val="1000"/>
-              <a:buNone/>
-              <a:defRPr sz="1000"/>
-            </a:lvl7pPr>
-            <a:lvl8pPr marL="3657600" lvl="7" indent="-228600" algn="l">
-              <a:lnSpc>
-                <a:spcPct val="90000"/>
-              </a:lnSpc>
-              <a:spcBef>
-                <a:spcPts val="500"/>
-              </a:spcBef>
-              <a:spcAft>
-                <a:spcPts val="0"/>
-              </a:spcAft>
-              <a:buClr>
-                <a:schemeClr val="dk1"/>
-              </a:buClr>
-              <a:buSzPts val="1000"/>
-              <a:buNone/>
-              <a:defRPr sz="1000"/>
-            </a:lvl8pPr>
-            <a:lvl9pPr marL="4114800" lvl="8" indent="-228600" algn="l">
-              <a:lnSpc>
-                <a:spcPct val="90000"/>
-              </a:lnSpc>
-              <a:spcBef>
-                <a:spcPts val="500"/>
-              </a:spcBef>
-              <a:spcAft>
-                <a:spcPts val="0"/>
-              </a:spcAft>
-              <a:buClr>
-                <a:schemeClr val="dk1"/>
-              </a:buClr>
-              <a:buSzPts val="1000"/>
-              <a:buNone/>
-              <a:defRPr sz="1000"/>
-            </a:lvl9pPr>
-          </a:lstStyle>
-          <a:p>
-            <a:endParaRPr/>
-          </a:p>
-        </p:txBody>
-      </p:sp>
-      <p:sp>
-        <p:nvSpPr>
-          <p:cNvPr id="62" name="Google Shape;62;p17"/>
-          <p:cNvSpPr txBox="1">
-            <a:spLocks noGrp="1"/>
-          </p:cNvSpPr>
-          <p:nvPr>
-            <p:ph type="dt" idx="10"/>
-          </p:nvPr>
-        </p:nvSpPr>
-        <p:spPr>
-          <a:xfrm>
-            <a:off x="838200" y="6356350"/>
-            <a:ext cx="2743200" cy="365125"/>
-          </a:xfrm>
-          <a:prstGeom prst="rect">
-            <a:avLst/>
-          </a:prstGeom>
-          <a:noFill/>
-          <a:ln>
-            <a:noFill/>
-          </a:ln>
-        </p:spPr>
-        <p:txBody>
-          <a:bodyPr spcFirstLastPara="1" wrap="square" lIns="91425" tIns="45700" rIns="91425" bIns="45700" anchor="ctr" anchorCtr="0">
-            <a:noAutofit/>
-          </a:bodyPr>
-          <a:lstStyle>
-            <a:lvl1pPr lvl="0" algn="l">
-              <a:spcBef>
-                <a:spcPts val="0"/>
-              </a:spcBef>
-              <a:spcAft>
-                <a:spcPts val="0"/>
-              </a:spcAft>
-              <a:buSzPts val="1400"/>
-              <a:buNone/>
-              <a:defRPr/>
-            </a:lvl1pPr>
-            <a:lvl2pPr lvl="1" algn="l">
-              <a:spcBef>
-                <a:spcPts val="0"/>
-              </a:spcBef>
-              <a:spcAft>
-                <a:spcPts val="0"/>
-              </a:spcAft>
-              <a:buSzPts val="1400"/>
-              <a:buNone/>
-              <a:defRPr/>
-            </a:lvl2pPr>
-            <a:lvl3pPr lvl="2" algn="l">
-              <a:spcBef>
-                <a:spcPts val="0"/>
-              </a:spcBef>
-              <a:spcAft>
-                <a:spcPts val="0"/>
-              </a:spcAft>
-              <a:buSzPts val="1400"/>
-              <a:buNone/>
-              <a:defRPr/>
-            </a:lvl3pPr>
-            <a:lvl4pPr lvl="3" algn="l">
-              <a:spcBef>
-                <a:spcPts val="0"/>
-              </a:spcBef>
-              <a:spcAft>
-                <a:spcPts val="0"/>
-              </a:spcAft>
-              <a:buSzPts val="1400"/>
-              <a:buNone/>
-              <a:defRPr/>
-            </a:lvl4pPr>
-            <a:lvl5pPr lvl="4" algn="l">
-              <a:spcBef>
-                <a:spcPts val="0"/>
-              </a:spcBef>
-              <a:spcAft>
-                <a:spcPts val="0"/>
-              </a:spcAft>
-              <a:buSzPts val="1400"/>
-              <a:buNone/>
-              <a:defRPr/>
-            </a:lvl5pPr>
-            <a:lvl6pPr lvl="5" algn="l">
-              <a:spcBef>
-                <a:spcPts val="0"/>
-              </a:spcBef>
-              <a:spcAft>
-                <a:spcPts val="0"/>
-              </a:spcAft>
-              <a:buSzPts val="1400"/>
-              <a:buNone/>
-              <a:defRPr/>
-            </a:lvl6pPr>
-            <a:lvl7pPr lvl="6" algn="l">
-              <a:spcBef>
-                <a:spcPts val="0"/>
-              </a:spcBef>
-              <a:spcAft>
-                <a:spcPts val="0"/>
-              </a:spcAft>
-              <a:buSzPts val="1400"/>
-              <a:buNone/>
-              <a:defRPr/>
-            </a:lvl7pPr>
-            <a:lvl8pPr lvl="7" algn="l">
-              <a:spcBef>
-                <a:spcPts val="0"/>
-              </a:spcBef>
-              <a:spcAft>
-                <a:spcPts val="0"/>
-              </a:spcAft>
-              <a:buSzPts val="1400"/>
-              <a:buNone/>
-              <a:defRPr/>
-            </a:lvl8pPr>
-            <a:lvl9pPr lvl="8" algn="l">
-              <a:spcBef>
-                <a:spcPts val="0"/>
-              </a:spcBef>
-              <a:spcAft>
-                <a:spcPts val="0"/>
-              </a:spcAft>
-              <a:buSzPts val="1400"/>
-              <a:buNone/>
-              <a:defRPr/>
-            </a:lvl9pPr>
-          </a:lstStyle>
-          <a:p>
-            <a:endParaRPr/>
-          </a:p>
-        </p:txBody>
-      </p:sp>
-      <p:sp>
-        <p:nvSpPr>
-          <p:cNvPr id="63" name="Google Shape;63;p17"/>
-          <p:cNvSpPr txBox="1">
-            <a:spLocks noGrp="1"/>
-          </p:cNvSpPr>
-          <p:nvPr>
-            <p:ph type="ftr" idx="11"/>
-          </p:nvPr>
-        </p:nvSpPr>
-        <p:spPr>
-          <a:xfrm>
-            <a:off x="4038600" y="6356350"/>
-            <a:ext cx="4114800" cy="365125"/>
-          </a:xfrm>
-          <a:prstGeom prst="rect">
-            <a:avLst/>
-          </a:prstGeom>
-          <a:noFill/>
-          <a:ln>
-            <a:noFill/>
-          </a:ln>
-        </p:spPr>
-        <p:txBody>
-          <a:bodyPr spcFirstLastPara="1" wrap="square" lIns="91425" tIns="45700" rIns="91425" bIns="45700" anchor="ctr" anchorCtr="0">
-            <a:noAutofit/>
-          </a:bodyPr>
-          <a:lstStyle>
-            <a:lvl1pPr lvl="0" algn="ctr">
-              <a:spcBef>
-                <a:spcPts val="0"/>
-              </a:spcBef>
-              <a:spcAft>
-                <a:spcPts val="0"/>
-              </a:spcAft>
-              <a:buSzPts val="1400"/>
-              <a:buNone/>
-              <a:defRPr/>
-            </a:lvl1pPr>
-            <a:lvl2pPr lvl="1" algn="l">
-              <a:spcBef>
-                <a:spcPts val="0"/>
-              </a:spcBef>
-              <a:spcAft>
-                <a:spcPts val="0"/>
-              </a:spcAft>
-              <a:buSzPts val="1400"/>
-              <a:buNone/>
-              <a:defRPr/>
-            </a:lvl2pPr>
-            <a:lvl3pPr lvl="2" algn="l">
-              <a:spcBef>
-                <a:spcPts val="0"/>
-              </a:spcBef>
-              <a:spcAft>
-                <a:spcPts val="0"/>
-              </a:spcAft>
-              <a:buSzPts val="1400"/>
-              <a:buNone/>
-              <a:defRPr/>
-            </a:lvl3pPr>
-            <a:lvl4pPr lvl="3" algn="l">
-              <a:spcBef>
-                <a:spcPts val="0"/>
-              </a:spcBef>
-              <a:spcAft>
-                <a:spcPts val="0"/>
-              </a:spcAft>
-              <a:buSzPts val="1400"/>
-              <a:buNone/>
-              <a:defRPr/>
-            </a:lvl4pPr>
-            <a:lvl5pPr lvl="4" algn="l">
-              <a:spcBef>
-                <a:spcPts val="0"/>
-              </a:spcBef>
-              <a:spcAft>
-                <a:spcPts val="0"/>
-              </a:spcAft>
-              <a:buSzPts val="1400"/>
-              <a:buNone/>
-              <a:defRPr/>
-            </a:lvl5pPr>
-            <a:lvl6pPr lvl="5" algn="l">
-              <a:spcBef>
-                <a:spcPts val="0"/>
-              </a:spcBef>
-              <a:spcAft>
-                <a:spcPts val="0"/>
-              </a:spcAft>
-              <a:buSzPts val="1400"/>
-              <a:buNone/>
-              <a:defRPr/>
-            </a:lvl6pPr>
-            <a:lvl7pPr lvl="6" algn="l">
-              <a:spcBef>
-                <a:spcPts val="0"/>
-              </a:spcBef>
-              <a:spcAft>
-                <a:spcPts val="0"/>
-              </a:spcAft>
-              <a:buSzPts val="1400"/>
-              <a:buNone/>
-              <a:defRPr/>
-            </a:lvl7pPr>
-            <a:lvl8pPr lvl="7" algn="l">
-              <a:spcBef>
-                <a:spcPts val="0"/>
-              </a:spcBef>
-              <a:spcAft>
-                <a:spcPts val="0"/>
-              </a:spcAft>
-              <a:buSzPts val="1400"/>
-              <a:buNone/>
-              <a:defRPr/>
-            </a:lvl8pPr>
-            <a:lvl9pPr lvl="8" algn="l">
-              <a:spcBef>
-                <a:spcPts val="0"/>
-              </a:spcBef>
-              <a:spcAft>
-                <a:spcPts val="0"/>
-              </a:spcAft>
-              <a:buSzPts val="1400"/>
-              <a:buNone/>
-              <a:defRPr/>
-            </a:lvl9pPr>
-          </a:lstStyle>
-          <a:p>
-            <a:endParaRPr/>
-          </a:p>
-        </p:txBody>
-      </p:sp>
-      <p:sp>
-        <p:nvSpPr>
-          <p:cNvPr id="64" name="Google Shape;64;p17"/>
-          <p:cNvSpPr txBox="1">
-            <a:spLocks noGrp="1"/>
-          </p:cNvSpPr>
-          <p:nvPr>
-            <p:ph type="sldNum" idx="12"/>
-          </p:nvPr>
-        </p:nvSpPr>
-        <p:spPr>
-          <a:xfrm>
-            <a:off x="8610600" y="6356350"/>
-            <a:ext cx="2743200" cy="365125"/>
-          </a:xfrm>
-          <a:prstGeom prst="rect">
-            <a:avLst/>
-          </a:prstGeom>
-          <a:noFill/>
-          <a:ln>
-            <a:noFill/>
-          </a:ln>
-        </p:spPr>
-        <p:txBody>
-          <a:bodyPr spcFirstLastPara="1" wrap="square" lIns="91425" tIns="45700" rIns="91425" bIns="45700" anchor="ctr" anchorCtr="0">
-            <a:noAutofit/>
-          </a:bodyPr>
-          <a:lstStyle>
-            <a:lvl1pPr marL="0" lvl="0" indent="0" algn="r">
-              <a:spcBef>
-                <a:spcPts val="0"/>
-              </a:spcBef>
-              <a:buNone/>
-              <a:defRPr/>
-            </a:lvl1pPr>
-            <a:lvl2pPr marL="0" lvl="1" indent="0" algn="r">
-              <a:spcBef>
-                <a:spcPts val="0"/>
-              </a:spcBef>
-              <a:buNone/>
-              <a:defRPr/>
-            </a:lvl2pPr>
-            <a:lvl3pPr marL="0" lvl="2" indent="0" algn="r">
-              <a:spcBef>
-                <a:spcPts val="0"/>
-              </a:spcBef>
-              <a:buNone/>
-              <a:defRPr/>
-            </a:lvl3pPr>
-            <a:lvl4pPr marL="0" lvl="3" indent="0" algn="r">
-              <a:spcBef>
-                <a:spcPts val="0"/>
-              </a:spcBef>
-              <a:buNone/>
-              <a:defRPr/>
-            </a:lvl4pPr>
-            <a:lvl5pPr marL="0" lvl="4" indent="0" algn="r">
-              <a:spcBef>
-                <a:spcPts val="0"/>
-              </a:spcBef>
-              <a:buNone/>
-              <a:defRPr/>
-            </a:lvl5pPr>
-            <a:lvl6pPr marL="0" lvl="5" indent="0" algn="r">
-              <a:spcBef>
-                <a:spcPts val="0"/>
-              </a:spcBef>
-              <a:buNone/>
-              <a:defRPr/>
-            </a:lvl6pPr>
-            <a:lvl7pPr marL="0" lvl="6" indent="0" algn="r">
-              <a:spcBef>
-                <a:spcPts val="0"/>
-              </a:spcBef>
-              <a:buNone/>
-              <a:defRPr/>
-            </a:lvl7pPr>
-            <a:lvl8pPr marL="0" lvl="7" indent="0" algn="r">
-              <a:spcBef>
-                <a:spcPts val="0"/>
-              </a:spcBef>
-              <a:buNone/>
-              <a:defRPr/>
-            </a:lvl8pPr>
-            <a:lvl9pPr marL="0" lvl="8" indent="0" algn="r">
-              <a:spcBef>
-                <a:spcPts val="0"/>
-              </a:spcBef>
-              <a:buNone/>
-              <a:defRPr/>
-            </a:lvl9pPr>
-          </a:lstStyle>
-          <a:p>
-            <a:pPr marL="0" lvl="0" indent="0" algn="r" rtl="0">
-              <a:spcBef>
-                <a:spcPts val="0"/>
-              </a:spcBef>
-              <a:spcAft>
-                <a:spcPts val="0"/>
-              </a:spcAft>
-              <a:buNone/>
-            </a:pPr>
-            <a:fld id="{00000000-1234-1234-1234-123412341234}" type="slidenum">
-              <a:rPr lang="en-IN"/>
-              <a:t>‹#›</a:t>
-            </a:fld>
-            <a:endParaRPr/>
-          </a:p>
-        </p:txBody>
-      </p:sp>
-    </p:spTree>
-  </p:cSld>
-  <p:clrMapOvr>
-    <a:masterClrMapping/>
-  </p:clrMapOvr>
-</p:sldLayout>
-</file>
-
-<file path=ppt/slideLayouts/slideLayout3.xml><?xml version="1.0" encoding="utf-8"?>
 <p:sldLayout xmlns:a="http://schemas.openxmlformats.org/drawingml/2006/main" xmlns:r="http://schemas.openxmlformats.org/officeDocument/2006/relationships" xmlns:p="http://schemas.openxmlformats.org/presentationml/2006/main" matchingName="Picture with Caption" type="picTx">
   <p:cSld name="PICTURE_WITH_CAPTION_TEXT">
     <p:spTree>
@@ -4705,7 +3925,7 @@
 </p:sldLayout>
 </file>
 
-<file path=ppt/slideLayouts/slideLayout4.xml><?xml version="1.0" encoding="utf-8"?>
+<file path=ppt/slideLayouts/slideLayout3.xml><?xml version="1.0" encoding="utf-8"?>
 <p:sldLayout xmlns:a="http://schemas.openxmlformats.org/drawingml/2006/main" xmlns:r="http://schemas.openxmlformats.org/officeDocument/2006/relationships" xmlns:p="http://schemas.openxmlformats.org/presentationml/2006/main" matchingName="Title and Vertical Text" type="vertTx">
   <p:cSld name="VERTICAL_TEXT">
     <p:spTree>
@@ -5432,7 +4652,7 @@
 </p:sldLayout>
 </file>
 
-<file path=ppt/slideLayouts/slideLayout5.xml><?xml version="1.0" encoding="utf-8"?>
+<file path=ppt/slideLayouts/slideLayout4.xml><?xml version="1.0" encoding="utf-8"?>
 <p:sldLayout xmlns:a="http://schemas.openxmlformats.org/drawingml/2006/main" xmlns:r="http://schemas.openxmlformats.org/officeDocument/2006/relationships" xmlns:p="http://schemas.openxmlformats.org/presentationml/2006/main" matchingName="Vertical Title and Text" type="vertTitleAndTx">
   <p:cSld name="VERTICAL_TITLE_AND_VERTICAL_TEXT">
     <p:spTree>
@@ -7197,10 +6417,9 @@
   <p:clrMap bg1="lt1" tx1="dk1" bg2="dk2" tx2="lt2" accent1="accent1" accent2="accent2" accent3="accent3" accent4="accent4" accent5="accent5" accent6="accent6" hlink="hlink" folHlink="folHlink"/>
   <p:sldLayoutIdLst>
     <p:sldLayoutId id="2147483650" r:id="rId1"/>
-    <p:sldLayoutId id="2147483656" r:id="rId2"/>
-    <p:sldLayoutId id="2147483657" r:id="rId3"/>
-    <p:sldLayoutId id="2147483658" r:id="rId4"/>
-    <p:sldLayoutId id="2147483659" r:id="rId5"/>
+    <p:sldLayoutId id="2147483657" r:id="rId2"/>
+    <p:sldLayoutId id="2147483658" r:id="rId3"/>
+    <p:sldLayoutId id="2147483659" r:id="rId4"/>
   </p:sldLayoutIdLst>
   <p:hf sldNum="0" hdr="0" ftr="0" dt="0"/>
   <p:txStyles>
@@ -8314,6 +7533,1936 @@
   <p:cSld>
     <p:spTree>
       <p:nvGrpSpPr>
+        <p:cNvPr id="1" name="Shape 189"/>
+        <p:cNvGrpSpPr/>
+        <p:nvPr/>
+      </p:nvGrpSpPr>
+      <p:grpSpPr>
+        <a:xfrm>
+          <a:off x="0" y="0"/>
+          <a:ext cx="0" cy="0"/>
+          <a:chOff x="0" y="0"/>
+          <a:chExt cx="0" cy="0"/>
+        </a:xfrm>
+      </p:grpSpPr>
+      <p:sp>
+        <p:nvSpPr>
+          <p:cNvPr id="190" name="Google Shape;190;p7"/>
+          <p:cNvSpPr txBox="1">
+            <a:spLocks noGrp="1"/>
+          </p:cNvSpPr>
+          <p:nvPr>
+            <p:ph type="title"/>
+          </p:nvPr>
+        </p:nvSpPr>
+        <p:spPr>
+          <a:xfrm>
+            <a:off x="0" y="18255"/>
+            <a:ext cx="10515600" cy="1325563"/>
+          </a:xfrm>
+          <a:prstGeom prst="rect">
+            <a:avLst/>
+          </a:prstGeom>
+          <a:noFill/>
+          <a:ln>
+            <a:noFill/>
+          </a:ln>
+        </p:spPr>
+        <p:txBody>
+          <a:bodyPr spcFirstLastPara="1" wrap="square" lIns="91425" tIns="45700" rIns="91425" bIns="45700" anchor="ctr" anchorCtr="0">
+            <a:normAutofit/>
+          </a:bodyPr>
+          <a:lstStyle/>
+          <a:p>
+            <a:pPr marL="0" lvl="0" indent="0" algn="l" rtl="0">
+              <a:lnSpc>
+                <a:spcPct val="90000"/>
+              </a:lnSpc>
+              <a:spcBef>
+                <a:spcPts val="0"/>
+              </a:spcBef>
+              <a:spcAft>
+                <a:spcPts val="0"/>
+              </a:spcAft>
+              <a:buClr>
+                <a:schemeClr val="dk1"/>
+              </a:buClr>
+              <a:buSzPts val="4400"/>
+              <a:buFont typeface="Arial"/>
+              <a:buNone/>
+            </a:pPr>
+            <a:r>
+              <a:rPr lang="en-IN" dirty="0">
+                <a:latin typeface="Arial"/>
+                <a:ea typeface="Arial"/>
+                <a:cs typeface="Arial"/>
+                <a:sym typeface="Arial"/>
+              </a:rPr>
+              <a:t> Impact &amp; Future Scope</a:t>
+            </a:r>
+            <a:endParaRPr dirty="0"/>
+          </a:p>
+        </p:txBody>
+      </p:sp>
+      <p:grpSp>
+        <p:nvGrpSpPr>
+          <p:cNvPr id="191" name="Google Shape;191;p7"/>
+          <p:cNvGrpSpPr/>
+          <p:nvPr/>
+        </p:nvGrpSpPr>
+        <p:grpSpPr>
+          <a:xfrm>
+            <a:off x="312819" y="1323475"/>
+            <a:ext cx="11755935" cy="1965960"/>
+            <a:chOff x="312819" y="1323475"/>
+            <a:chExt cx="11755935" cy="1965960"/>
+          </a:xfrm>
+        </p:grpSpPr>
+        <p:sp>
+          <p:nvSpPr>
+            <p:cNvPr id="192" name="Google Shape;192;p7"/>
+            <p:cNvSpPr/>
+            <p:nvPr/>
+          </p:nvSpPr>
+          <p:spPr>
+            <a:xfrm>
+              <a:off x="312819" y="1323475"/>
+              <a:ext cx="2880000" cy="1965960"/>
+            </a:xfrm>
+            <a:prstGeom prst="roundRect">
+              <a:avLst>
+                <a:gd name="adj" fmla="val 4651"/>
+              </a:avLst>
+            </a:prstGeom>
+            <a:solidFill>
+              <a:srgbClr val="028090"/>
+            </a:solidFill>
+            <a:ln>
+              <a:noFill/>
+            </a:ln>
+          </p:spPr>
+          <p:txBody>
+            <a:bodyPr spcFirstLastPara="1" wrap="square" lIns="91425" tIns="45700" rIns="91425" bIns="45700" anchor="t" anchorCtr="0">
+              <a:noAutofit/>
+            </a:bodyPr>
+            <a:lstStyle/>
+            <a:p>
+              <a:pPr marL="0" marR="0" lvl="0" indent="0" algn="l" rtl="0">
+                <a:spcBef>
+                  <a:spcPts val="0"/>
+                </a:spcBef>
+                <a:spcAft>
+                  <a:spcPts val="0"/>
+                </a:spcAft>
+                <a:buNone/>
+              </a:pPr>
+              <a:endParaRPr sz="1800">
+                <a:solidFill>
+                  <a:schemeClr val="dk1"/>
+                </a:solidFill>
+                <a:latin typeface="Arial"/>
+                <a:ea typeface="Arial"/>
+                <a:cs typeface="Arial"/>
+                <a:sym typeface="Arial"/>
+              </a:endParaRPr>
+            </a:p>
+          </p:txBody>
+        </p:sp>
+        <p:sp>
+          <p:nvSpPr>
+            <p:cNvPr id="193" name="Google Shape;193;p7"/>
+            <p:cNvSpPr/>
+            <p:nvPr/>
+          </p:nvSpPr>
+          <p:spPr>
+            <a:xfrm>
+              <a:off x="513987" y="1524643"/>
+              <a:ext cx="502920" cy="502920"/>
+            </a:xfrm>
+            <a:prstGeom prst="ellipse">
+              <a:avLst/>
+            </a:prstGeom>
+            <a:solidFill>
+              <a:srgbClr val="02C39A"/>
+            </a:solidFill>
+            <a:ln>
+              <a:noFill/>
+            </a:ln>
+          </p:spPr>
+          <p:txBody>
+            <a:bodyPr spcFirstLastPara="1" wrap="square" lIns="91425" tIns="45700" rIns="91425" bIns="45700" anchor="t" anchorCtr="0">
+              <a:noAutofit/>
+            </a:bodyPr>
+            <a:lstStyle/>
+            <a:p>
+              <a:pPr marL="0" marR="0" lvl="0" indent="0" algn="l" rtl="0">
+                <a:spcBef>
+                  <a:spcPts val="0"/>
+                </a:spcBef>
+                <a:spcAft>
+                  <a:spcPts val="0"/>
+                </a:spcAft>
+                <a:buNone/>
+              </a:pPr>
+              <a:endParaRPr sz="1800">
+                <a:solidFill>
+                  <a:schemeClr val="dk1"/>
+                </a:solidFill>
+                <a:latin typeface="Arial"/>
+                <a:ea typeface="Arial"/>
+                <a:cs typeface="Arial"/>
+                <a:sym typeface="Arial"/>
+              </a:endParaRPr>
+            </a:p>
+          </p:txBody>
+        </p:sp>
+        <p:pic>
+          <p:nvPicPr>
+            <p:cNvPr id="194" name="Google Shape;194;p7" descr="preencoded.png"/>
+            <p:cNvPicPr preferRelativeResize="0"/>
+            <p:nvPr/>
+          </p:nvPicPr>
+          <p:blipFill rotWithShape="1">
+            <a:blip r:embed="rId3">
+              <a:alphaModFix/>
+            </a:blip>
+            <a:srcRect/>
+            <a:stretch/>
+          </p:blipFill>
+          <p:spPr>
+            <a:xfrm>
+              <a:off x="614571" y="1625227"/>
+              <a:ext cx="301752" cy="301752"/>
+            </a:xfrm>
+            <a:prstGeom prst="rect">
+              <a:avLst/>
+            </a:prstGeom>
+            <a:noFill/>
+            <a:ln>
+              <a:noFill/>
+            </a:ln>
+          </p:spPr>
+        </p:pic>
+        <p:sp>
+          <p:nvSpPr>
+            <p:cNvPr id="195" name="Google Shape;195;p7"/>
+            <p:cNvSpPr/>
+            <p:nvPr/>
+          </p:nvSpPr>
+          <p:spPr>
+            <a:xfrm>
+              <a:off x="1218075" y="1561219"/>
+              <a:ext cx="2203704" cy="365760"/>
+            </a:xfrm>
+            <a:prstGeom prst="rect">
+              <a:avLst/>
+            </a:prstGeom>
+            <a:noFill/>
+            <a:ln>
+              <a:noFill/>
+            </a:ln>
+          </p:spPr>
+          <p:txBody>
+            <a:bodyPr spcFirstLastPara="1" wrap="square" lIns="0" tIns="0" rIns="0" bIns="0" anchor="ctr" anchorCtr="0">
+              <a:noAutofit/>
+            </a:bodyPr>
+            <a:lstStyle/>
+            <a:p>
+              <a:pPr marL="0" marR="0" lvl="0" indent="0" algn="l" rtl="0">
+                <a:spcBef>
+                  <a:spcPts val="0"/>
+                </a:spcBef>
+                <a:spcAft>
+                  <a:spcPts val="0"/>
+                </a:spcAft>
+                <a:buClr>
+                  <a:srgbClr val="FFFFFF"/>
+                </a:buClr>
+                <a:buSzPts val="1600"/>
+                <a:buFont typeface="Arial"/>
+                <a:buNone/>
+              </a:pPr>
+              <a:r>
+                <a:rPr lang="en-IN" sz="1600" b="1">
+                  <a:solidFill>
+                    <a:srgbClr val="FFFFFF"/>
+                  </a:solidFill>
+                  <a:latin typeface="Arial"/>
+                  <a:ea typeface="Arial"/>
+                  <a:cs typeface="Arial"/>
+                  <a:sym typeface="Arial"/>
+                </a:rPr>
+                <a:t>Faster healthcare</a:t>
+              </a:r>
+              <a:endParaRPr sz="1600">
+                <a:solidFill>
+                  <a:schemeClr val="dk1"/>
+                </a:solidFill>
+                <a:latin typeface="Arial"/>
+                <a:ea typeface="Arial"/>
+                <a:cs typeface="Arial"/>
+                <a:sym typeface="Arial"/>
+              </a:endParaRPr>
+            </a:p>
+          </p:txBody>
+        </p:sp>
+        <p:sp>
+          <p:nvSpPr>
+            <p:cNvPr id="196" name="Google Shape;196;p7"/>
+            <p:cNvSpPr/>
+            <p:nvPr/>
+          </p:nvSpPr>
+          <p:spPr>
+            <a:xfrm>
+              <a:off x="674834" y="2265307"/>
+              <a:ext cx="2203704" cy="685800"/>
+            </a:xfrm>
+            <a:prstGeom prst="rect">
+              <a:avLst/>
+            </a:prstGeom>
+            <a:noFill/>
+            <a:ln>
+              <a:noFill/>
+            </a:ln>
+          </p:spPr>
+          <p:txBody>
+            <a:bodyPr spcFirstLastPara="1" wrap="square" lIns="0" tIns="0" rIns="0" bIns="0" anchor="ctr" anchorCtr="0">
+              <a:noAutofit/>
+            </a:bodyPr>
+            <a:lstStyle/>
+            <a:p>
+              <a:pPr marL="0" marR="0" lvl="0" indent="0" algn="l" rtl="0">
+                <a:lnSpc>
+                  <a:spcPct val="150000"/>
+                </a:lnSpc>
+                <a:spcBef>
+                  <a:spcPts val="0"/>
+                </a:spcBef>
+                <a:spcAft>
+                  <a:spcPts val="0"/>
+                </a:spcAft>
+                <a:buClr>
+                  <a:srgbClr val="E3F5F2"/>
+                </a:buClr>
+                <a:buSzPts val="1600"/>
+                <a:buFont typeface="Arial"/>
+                <a:buNone/>
+              </a:pPr>
+              <a:r>
+                <a:rPr lang="en-IN" sz="1600">
+                  <a:solidFill>
+                    <a:srgbClr val="E3F5F2"/>
+                  </a:solidFill>
+                  <a:latin typeface="Arial"/>
+                  <a:ea typeface="Arial"/>
+                  <a:cs typeface="Arial"/>
+                  <a:sym typeface="Arial"/>
+                </a:rPr>
+                <a:t>First-level check-up in minutes, right inside the village.</a:t>
+              </a:r>
+              <a:endParaRPr sz="1600">
+                <a:solidFill>
+                  <a:schemeClr val="dk1"/>
+                </a:solidFill>
+                <a:latin typeface="Arial"/>
+                <a:ea typeface="Arial"/>
+                <a:cs typeface="Arial"/>
+                <a:sym typeface="Arial"/>
+              </a:endParaRPr>
+            </a:p>
+          </p:txBody>
+        </p:sp>
+        <p:sp>
+          <p:nvSpPr>
+            <p:cNvPr id="197" name="Google Shape;197;p7"/>
+            <p:cNvSpPr/>
+            <p:nvPr/>
+          </p:nvSpPr>
+          <p:spPr>
+            <a:xfrm>
+              <a:off x="3254300" y="1323475"/>
+              <a:ext cx="2880000" cy="1965960"/>
+            </a:xfrm>
+            <a:prstGeom prst="roundRect">
+              <a:avLst>
+                <a:gd name="adj" fmla="val 4651"/>
+              </a:avLst>
+            </a:prstGeom>
+            <a:solidFill>
+              <a:srgbClr val="028090"/>
+            </a:solidFill>
+            <a:ln>
+              <a:noFill/>
+            </a:ln>
+          </p:spPr>
+          <p:txBody>
+            <a:bodyPr spcFirstLastPara="1" wrap="square" lIns="91425" tIns="45700" rIns="91425" bIns="45700" anchor="t" anchorCtr="0">
+              <a:noAutofit/>
+            </a:bodyPr>
+            <a:lstStyle/>
+            <a:p>
+              <a:pPr marL="0" marR="0" lvl="0" indent="0" algn="l" rtl="0">
+                <a:spcBef>
+                  <a:spcPts val="0"/>
+                </a:spcBef>
+                <a:spcAft>
+                  <a:spcPts val="0"/>
+                </a:spcAft>
+                <a:buNone/>
+              </a:pPr>
+              <a:endParaRPr sz="1800">
+                <a:solidFill>
+                  <a:schemeClr val="dk1"/>
+                </a:solidFill>
+                <a:latin typeface="Arial"/>
+                <a:ea typeface="Arial"/>
+                <a:cs typeface="Arial"/>
+                <a:sym typeface="Arial"/>
+              </a:endParaRPr>
+            </a:p>
+          </p:txBody>
+        </p:sp>
+        <p:sp>
+          <p:nvSpPr>
+            <p:cNvPr id="198" name="Google Shape;198;p7"/>
+            <p:cNvSpPr/>
+            <p:nvPr/>
+          </p:nvSpPr>
+          <p:spPr>
+            <a:xfrm>
+              <a:off x="3330339" y="1524643"/>
+              <a:ext cx="502920" cy="502920"/>
+            </a:xfrm>
+            <a:prstGeom prst="ellipse">
+              <a:avLst/>
+            </a:prstGeom>
+            <a:solidFill>
+              <a:srgbClr val="02C39A"/>
+            </a:solidFill>
+            <a:ln>
+              <a:noFill/>
+            </a:ln>
+          </p:spPr>
+          <p:txBody>
+            <a:bodyPr spcFirstLastPara="1" wrap="square" lIns="91425" tIns="45700" rIns="91425" bIns="45700" anchor="t" anchorCtr="0">
+              <a:noAutofit/>
+            </a:bodyPr>
+            <a:lstStyle/>
+            <a:p>
+              <a:pPr marL="0" marR="0" lvl="0" indent="0" algn="l" rtl="0">
+                <a:spcBef>
+                  <a:spcPts val="0"/>
+                </a:spcBef>
+                <a:spcAft>
+                  <a:spcPts val="0"/>
+                </a:spcAft>
+                <a:buNone/>
+              </a:pPr>
+              <a:endParaRPr sz="1800">
+                <a:solidFill>
+                  <a:schemeClr val="dk1"/>
+                </a:solidFill>
+                <a:latin typeface="Arial"/>
+                <a:ea typeface="Arial"/>
+                <a:cs typeface="Arial"/>
+                <a:sym typeface="Arial"/>
+              </a:endParaRPr>
+            </a:p>
+          </p:txBody>
+        </p:sp>
+        <p:pic>
+          <p:nvPicPr>
+            <p:cNvPr id="199" name="Google Shape;199;p7" descr="preencoded.png"/>
+            <p:cNvPicPr preferRelativeResize="0"/>
+            <p:nvPr/>
+          </p:nvPicPr>
+          <p:blipFill rotWithShape="1">
+            <a:blip r:embed="rId4">
+              <a:alphaModFix/>
+            </a:blip>
+            <a:srcRect/>
+            <a:stretch/>
+          </p:blipFill>
+          <p:spPr>
+            <a:xfrm>
+              <a:off x="3430923" y="1625227"/>
+              <a:ext cx="301752" cy="301752"/>
+            </a:xfrm>
+            <a:prstGeom prst="rect">
+              <a:avLst/>
+            </a:prstGeom>
+            <a:noFill/>
+            <a:ln>
+              <a:noFill/>
+            </a:ln>
+          </p:spPr>
+        </p:pic>
+        <p:sp>
+          <p:nvSpPr>
+            <p:cNvPr id="200" name="Google Shape;200;p7"/>
+            <p:cNvSpPr/>
+            <p:nvPr/>
+          </p:nvSpPr>
+          <p:spPr>
+            <a:xfrm>
+              <a:off x="3993279" y="1561219"/>
+              <a:ext cx="2203704" cy="365760"/>
+            </a:xfrm>
+            <a:prstGeom prst="rect">
+              <a:avLst/>
+            </a:prstGeom>
+            <a:noFill/>
+            <a:ln>
+              <a:noFill/>
+            </a:ln>
+          </p:spPr>
+          <p:txBody>
+            <a:bodyPr spcFirstLastPara="1" wrap="square" lIns="0" tIns="0" rIns="0" bIns="0" anchor="ctr" anchorCtr="0">
+              <a:noAutofit/>
+            </a:bodyPr>
+            <a:lstStyle/>
+            <a:p>
+              <a:pPr marL="0" marR="0" lvl="0" indent="0" algn="l" rtl="0">
+                <a:spcBef>
+                  <a:spcPts val="0"/>
+                </a:spcBef>
+                <a:spcAft>
+                  <a:spcPts val="0"/>
+                </a:spcAft>
+                <a:buClr>
+                  <a:srgbClr val="FFFFFF"/>
+                </a:buClr>
+                <a:buSzPts val="1600"/>
+                <a:buFont typeface="Arial"/>
+                <a:buNone/>
+              </a:pPr>
+              <a:r>
+                <a:rPr lang="en-IN" sz="1600" b="1">
+                  <a:solidFill>
+                    <a:srgbClr val="FFFFFF"/>
+                  </a:solidFill>
+                  <a:latin typeface="Arial"/>
+                  <a:ea typeface="Arial"/>
+                  <a:cs typeface="Arial"/>
+                  <a:sym typeface="Arial"/>
+                </a:rPr>
+                <a:t>Decongested OPDs</a:t>
+              </a:r>
+              <a:endParaRPr sz="1600">
+                <a:solidFill>
+                  <a:schemeClr val="dk1"/>
+                </a:solidFill>
+                <a:latin typeface="Arial"/>
+                <a:ea typeface="Arial"/>
+                <a:cs typeface="Arial"/>
+                <a:sym typeface="Arial"/>
+              </a:endParaRPr>
+            </a:p>
+          </p:txBody>
+        </p:sp>
+        <p:sp>
+          <p:nvSpPr>
+            <p:cNvPr id="201" name="Google Shape;201;p7"/>
+            <p:cNvSpPr/>
+            <p:nvPr/>
+          </p:nvSpPr>
+          <p:spPr>
+            <a:xfrm>
+              <a:off x="3609469" y="2238383"/>
+              <a:ext cx="2203704" cy="685800"/>
+            </a:xfrm>
+            <a:prstGeom prst="rect">
+              <a:avLst/>
+            </a:prstGeom>
+            <a:noFill/>
+            <a:ln>
+              <a:noFill/>
+            </a:ln>
+          </p:spPr>
+          <p:txBody>
+            <a:bodyPr spcFirstLastPara="1" wrap="square" lIns="0" tIns="0" rIns="0" bIns="0" anchor="ctr" anchorCtr="0">
+              <a:noAutofit/>
+            </a:bodyPr>
+            <a:lstStyle/>
+            <a:p>
+              <a:pPr marL="0" marR="0" lvl="0" indent="0" algn="l" rtl="0">
+                <a:lnSpc>
+                  <a:spcPct val="150000"/>
+                </a:lnSpc>
+                <a:spcBef>
+                  <a:spcPts val="0"/>
+                </a:spcBef>
+                <a:spcAft>
+                  <a:spcPts val="0"/>
+                </a:spcAft>
+                <a:buClr>
+                  <a:srgbClr val="E3F5F2"/>
+                </a:buClr>
+                <a:buSzPts val="1600"/>
+                <a:buFont typeface="Arial"/>
+                <a:buNone/>
+              </a:pPr>
+              <a:r>
+                <a:rPr lang="en-IN" sz="1600">
+                  <a:solidFill>
+                    <a:srgbClr val="E3F5F2"/>
+                  </a:solidFill>
+                  <a:latin typeface="Arial"/>
+                  <a:ea typeface="Arial"/>
+                  <a:cs typeface="Arial"/>
+                  <a:sym typeface="Arial"/>
+                </a:rPr>
+                <a:t>Minor cases handled at the kiosk, so hospitals see fewer crowds.</a:t>
+              </a:r>
+              <a:endParaRPr sz="1600">
+                <a:solidFill>
+                  <a:schemeClr val="dk1"/>
+                </a:solidFill>
+                <a:latin typeface="Arial"/>
+                <a:ea typeface="Arial"/>
+                <a:cs typeface="Arial"/>
+                <a:sym typeface="Arial"/>
+              </a:endParaRPr>
+            </a:p>
+          </p:txBody>
+        </p:sp>
+        <p:sp>
+          <p:nvSpPr>
+            <p:cNvPr id="202" name="Google Shape;202;p7"/>
+            <p:cNvSpPr/>
+            <p:nvPr/>
+          </p:nvSpPr>
+          <p:spPr>
+            <a:xfrm>
+              <a:off x="6247275" y="1323475"/>
+              <a:ext cx="2880000" cy="1965960"/>
+            </a:xfrm>
+            <a:prstGeom prst="roundRect">
+              <a:avLst>
+                <a:gd name="adj" fmla="val 4651"/>
+              </a:avLst>
+            </a:prstGeom>
+            <a:solidFill>
+              <a:srgbClr val="028090"/>
+            </a:solidFill>
+            <a:ln>
+              <a:noFill/>
+            </a:ln>
+          </p:spPr>
+          <p:txBody>
+            <a:bodyPr spcFirstLastPara="1" wrap="square" lIns="91425" tIns="45700" rIns="91425" bIns="45700" anchor="t" anchorCtr="0">
+              <a:noAutofit/>
+            </a:bodyPr>
+            <a:lstStyle/>
+            <a:p>
+              <a:pPr marL="0" marR="0" lvl="0" indent="0" algn="l" rtl="0">
+                <a:spcBef>
+                  <a:spcPts val="0"/>
+                </a:spcBef>
+                <a:spcAft>
+                  <a:spcPts val="0"/>
+                </a:spcAft>
+                <a:buNone/>
+              </a:pPr>
+              <a:endParaRPr sz="1800">
+                <a:solidFill>
+                  <a:schemeClr val="dk1"/>
+                </a:solidFill>
+                <a:latin typeface="Arial"/>
+                <a:ea typeface="Arial"/>
+                <a:cs typeface="Arial"/>
+                <a:sym typeface="Arial"/>
+              </a:endParaRPr>
+            </a:p>
+          </p:txBody>
+        </p:sp>
+        <p:sp>
+          <p:nvSpPr>
+            <p:cNvPr id="203" name="Google Shape;203;p7"/>
+            <p:cNvSpPr/>
+            <p:nvPr/>
+          </p:nvSpPr>
+          <p:spPr>
+            <a:xfrm>
+              <a:off x="6339194" y="1524643"/>
+              <a:ext cx="502920" cy="502920"/>
+            </a:xfrm>
+            <a:prstGeom prst="ellipse">
+              <a:avLst/>
+            </a:prstGeom>
+            <a:solidFill>
+              <a:srgbClr val="02C39A"/>
+            </a:solidFill>
+            <a:ln>
+              <a:noFill/>
+            </a:ln>
+          </p:spPr>
+          <p:txBody>
+            <a:bodyPr spcFirstLastPara="1" wrap="square" lIns="91425" tIns="45700" rIns="91425" bIns="45700" anchor="t" anchorCtr="0">
+              <a:noAutofit/>
+            </a:bodyPr>
+            <a:lstStyle/>
+            <a:p>
+              <a:pPr marL="0" marR="0" lvl="0" indent="0" algn="l" rtl="0">
+                <a:spcBef>
+                  <a:spcPts val="0"/>
+                </a:spcBef>
+                <a:spcAft>
+                  <a:spcPts val="0"/>
+                </a:spcAft>
+                <a:buNone/>
+              </a:pPr>
+              <a:endParaRPr sz="1800">
+                <a:solidFill>
+                  <a:schemeClr val="dk1"/>
+                </a:solidFill>
+                <a:latin typeface="Arial"/>
+                <a:ea typeface="Arial"/>
+                <a:cs typeface="Arial"/>
+                <a:sym typeface="Arial"/>
+              </a:endParaRPr>
+            </a:p>
+          </p:txBody>
+        </p:sp>
+        <p:pic>
+          <p:nvPicPr>
+            <p:cNvPr id="204" name="Google Shape;204;p7" descr="preencoded.png"/>
+            <p:cNvPicPr preferRelativeResize="0"/>
+            <p:nvPr/>
+          </p:nvPicPr>
+          <p:blipFill rotWithShape="1">
+            <a:blip r:embed="rId5">
+              <a:alphaModFix/>
+            </a:blip>
+            <a:srcRect/>
+            <a:stretch/>
+          </p:blipFill>
+          <p:spPr>
+            <a:xfrm>
+              <a:off x="6433094" y="1625227"/>
+              <a:ext cx="301752" cy="301752"/>
+            </a:xfrm>
+            <a:prstGeom prst="rect">
+              <a:avLst/>
+            </a:prstGeom>
+            <a:noFill/>
+            <a:ln>
+              <a:noFill/>
+            </a:ln>
+          </p:spPr>
+        </p:pic>
+        <p:sp>
+          <p:nvSpPr>
+            <p:cNvPr id="205" name="Google Shape;205;p7"/>
+            <p:cNvSpPr/>
+            <p:nvPr/>
+          </p:nvSpPr>
+          <p:spPr>
+            <a:xfrm>
+              <a:off x="7031010" y="1547503"/>
+              <a:ext cx="2203704" cy="365760"/>
+            </a:xfrm>
+            <a:prstGeom prst="rect">
+              <a:avLst/>
+            </a:prstGeom>
+            <a:noFill/>
+            <a:ln>
+              <a:noFill/>
+            </a:ln>
+          </p:spPr>
+          <p:txBody>
+            <a:bodyPr spcFirstLastPara="1" wrap="square" lIns="0" tIns="0" rIns="0" bIns="0" anchor="ctr" anchorCtr="0">
+              <a:noAutofit/>
+            </a:bodyPr>
+            <a:lstStyle/>
+            <a:p>
+              <a:pPr marL="0" marR="0" lvl="0" indent="0" algn="l" rtl="0">
+                <a:spcBef>
+                  <a:spcPts val="0"/>
+                </a:spcBef>
+                <a:spcAft>
+                  <a:spcPts val="0"/>
+                </a:spcAft>
+                <a:buClr>
+                  <a:srgbClr val="FFFFFF"/>
+                </a:buClr>
+                <a:buSzPts val="1600"/>
+                <a:buFont typeface="Arial"/>
+                <a:buNone/>
+              </a:pPr>
+              <a:r>
+                <a:rPr lang="en-IN" sz="1600" b="1">
+                  <a:solidFill>
+                    <a:srgbClr val="FFFFFF"/>
+                  </a:solidFill>
+                  <a:latin typeface="Arial"/>
+                  <a:ea typeface="Arial"/>
+                  <a:cs typeface="Arial"/>
+                  <a:sym typeface="Arial"/>
+                </a:rPr>
+                <a:t>Specialists freed up</a:t>
+              </a:r>
+              <a:endParaRPr sz="1600">
+                <a:solidFill>
+                  <a:schemeClr val="dk1"/>
+                </a:solidFill>
+                <a:latin typeface="Arial"/>
+                <a:ea typeface="Arial"/>
+                <a:cs typeface="Arial"/>
+                <a:sym typeface="Arial"/>
+              </a:endParaRPr>
+            </a:p>
+          </p:txBody>
+        </p:sp>
+        <p:sp>
+          <p:nvSpPr>
+            <p:cNvPr id="206" name="Google Shape;206;p7"/>
+            <p:cNvSpPr/>
+            <p:nvPr/>
+          </p:nvSpPr>
+          <p:spPr>
+            <a:xfrm>
+              <a:off x="6647200" y="2238383"/>
+              <a:ext cx="2203704" cy="685800"/>
+            </a:xfrm>
+            <a:prstGeom prst="rect">
+              <a:avLst/>
+            </a:prstGeom>
+            <a:noFill/>
+            <a:ln>
+              <a:noFill/>
+            </a:ln>
+          </p:spPr>
+          <p:txBody>
+            <a:bodyPr spcFirstLastPara="1" wrap="square" lIns="0" tIns="0" rIns="0" bIns="0" anchor="ctr" anchorCtr="0">
+              <a:noAutofit/>
+            </a:bodyPr>
+            <a:lstStyle/>
+            <a:p>
+              <a:pPr marL="0" marR="0" lvl="0" indent="0" algn="l" rtl="0">
+                <a:lnSpc>
+                  <a:spcPct val="150000"/>
+                </a:lnSpc>
+                <a:spcBef>
+                  <a:spcPts val="0"/>
+                </a:spcBef>
+                <a:spcAft>
+                  <a:spcPts val="0"/>
+                </a:spcAft>
+                <a:buClr>
+                  <a:srgbClr val="E3F5F2"/>
+                </a:buClr>
+                <a:buSzPts val="1600"/>
+                <a:buFont typeface="Arial"/>
+                <a:buNone/>
+              </a:pPr>
+              <a:r>
+                <a:rPr lang="en-IN" sz="1600">
+                  <a:solidFill>
+                    <a:srgbClr val="E3F5F2"/>
+                  </a:solidFill>
+                  <a:latin typeface="Arial"/>
+                  <a:ea typeface="Arial"/>
+                  <a:cs typeface="Arial"/>
+                  <a:sym typeface="Arial"/>
+                </a:rPr>
+                <a:t>Doctors spend time on serious cases instead of routine ones.</a:t>
+              </a:r>
+              <a:endParaRPr sz="1600">
+                <a:solidFill>
+                  <a:schemeClr val="dk1"/>
+                </a:solidFill>
+                <a:latin typeface="Arial"/>
+                <a:ea typeface="Arial"/>
+                <a:cs typeface="Arial"/>
+                <a:sym typeface="Arial"/>
+              </a:endParaRPr>
+            </a:p>
+          </p:txBody>
+        </p:sp>
+        <p:sp>
+          <p:nvSpPr>
+            <p:cNvPr id="207" name="Google Shape;207;p7"/>
+            <p:cNvSpPr/>
+            <p:nvPr/>
+          </p:nvSpPr>
+          <p:spPr>
+            <a:xfrm>
+              <a:off x="9188754" y="1323475"/>
+              <a:ext cx="2880000" cy="1965960"/>
+            </a:xfrm>
+            <a:prstGeom prst="roundRect">
+              <a:avLst>
+                <a:gd name="adj" fmla="val 4651"/>
+              </a:avLst>
+            </a:prstGeom>
+            <a:solidFill>
+              <a:srgbClr val="028090"/>
+            </a:solidFill>
+            <a:ln>
+              <a:noFill/>
+            </a:ln>
+          </p:spPr>
+          <p:txBody>
+            <a:bodyPr spcFirstLastPara="1" wrap="square" lIns="91425" tIns="45700" rIns="91425" bIns="45700" anchor="t" anchorCtr="0">
+              <a:noAutofit/>
+            </a:bodyPr>
+            <a:lstStyle/>
+            <a:p>
+              <a:pPr marL="0" marR="0" lvl="0" indent="0" algn="l" rtl="0">
+                <a:spcBef>
+                  <a:spcPts val="0"/>
+                </a:spcBef>
+                <a:spcAft>
+                  <a:spcPts val="0"/>
+                </a:spcAft>
+                <a:buNone/>
+              </a:pPr>
+              <a:endParaRPr sz="1800">
+                <a:solidFill>
+                  <a:schemeClr val="dk1"/>
+                </a:solidFill>
+                <a:latin typeface="Arial"/>
+                <a:ea typeface="Arial"/>
+                <a:cs typeface="Arial"/>
+                <a:sym typeface="Arial"/>
+              </a:endParaRPr>
+            </a:p>
+          </p:txBody>
+        </p:sp>
+        <p:sp>
+          <p:nvSpPr>
+            <p:cNvPr id="208" name="Google Shape;208;p7"/>
+            <p:cNvSpPr/>
+            <p:nvPr/>
+          </p:nvSpPr>
+          <p:spPr>
+            <a:xfrm>
+              <a:off x="9246986" y="1524643"/>
+              <a:ext cx="502920" cy="502920"/>
+            </a:xfrm>
+            <a:prstGeom prst="ellipse">
+              <a:avLst/>
+            </a:prstGeom>
+            <a:solidFill>
+              <a:srgbClr val="02C39A"/>
+            </a:solidFill>
+            <a:ln>
+              <a:noFill/>
+            </a:ln>
+          </p:spPr>
+          <p:txBody>
+            <a:bodyPr spcFirstLastPara="1" wrap="square" lIns="91425" tIns="45700" rIns="91425" bIns="45700" anchor="t" anchorCtr="0">
+              <a:noAutofit/>
+            </a:bodyPr>
+            <a:lstStyle/>
+            <a:p>
+              <a:pPr marL="0" marR="0" lvl="0" indent="0" algn="l" rtl="0">
+                <a:spcBef>
+                  <a:spcPts val="0"/>
+                </a:spcBef>
+                <a:spcAft>
+                  <a:spcPts val="0"/>
+                </a:spcAft>
+                <a:buNone/>
+              </a:pPr>
+              <a:endParaRPr sz="1800">
+                <a:solidFill>
+                  <a:schemeClr val="dk1"/>
+                </a:solidFill>
+                <a:latin typeface="Arial"/>
+                <a:ea typeface="Arial"/>
+                <a:cs typeface="Arial"/>
+                <a:sym typeface="Arial"/>
+              </a:endParaRPr>
+            </a:p>
+          </p:txBody>
+        </p:sp>
+        <p:pic>
+          <p:nvPicPr>
+            <p:cNvPr id="209" name="Google Shape;209;p7" descr="preencoded.png"/>
+            <p:cNvPicPr preferRelativeResize="0"/>
+            <p:nvPr/>
+          </p:nvPicPr>
+          <p:blipFill rotWithShape="1">
+            <a:blip r:embed="rId6">
+              <a:alphaModFix/>
+            </a:blip>
+            <a:srcRect/>
+            <a:stretch/>
+          </p:blipFill>
+          <p:spPr>
+            <a:xfrm>
+              <a:off x="9335806" y="1625227"/>
+              <a:ext cx="301752" cy="301752"/>
+            </a:xfrm>
+            <a:prstGeom prst="rect">
+              <a:avLst/>
+            </a:prstGeom>
+            <a:noFill/>
+            <a:ln>
+              <a:noFill/>
+            </a:ln>
+          </p:spPr>
+        </p:pic>
+        <p:sp>
+          <p:nvSpPr>
+            <p:cNvPr id="210" name="Google Shape;210;p7"/>
+            <p:cNvSpPr/>
+            <p:nvPr/>
+          </p:nvSpPr>
+          <p:spPr>
+            <a:xfrm>
+              <a:off x="9806214" y="1547503"/>
+              <a:ext cx="2203704" cy="365760"/>
+            </a:xfrm>
+            <a:prstGeom prst="rect">
+              <a:avLst/>
+            </a:prstGeom>
+            <a:noFill/>
+            <a:ln>
+              <a:noFill/>
+            </a:ln>
+          </p:spPr>
+          <p:txBody>
+            <a:bodyPr spcFirstLastPara="1" wrap="square" lIns="0" tIns="0" rIns="0" bIns="0" anchor="ctr" anchorCtr="0">
+              <a:noAutofit/>
+            </a:bodyPr>
+            <a:lstStyle/>
+            <a:p>
+              <a:pPr marL="0" marR="0" lvl="0" indent="0" algn="l" rtl="0">
+                <a:spcBef>
+                  <a:spcPts val="0"/>
+                </a:spcBef>
+                <a:spcAft>
+                  <a:spcPts val="0"/>
+                </a:spcAft>
+                <a:buClr>
+                  <a:srgbClr val="FFFFFF"/>
+                </a:buClr>
+                <a:buSzPts val="1600"/>
+                <a:buFont typeface="Arial"/>
+                <a:buNone/>
+              </a:pPr>
+              <a:r>
+                <a:rPr lang="en-IN" sz="1600" b="1">
+                  <a:solidFill>
+                    <a:srgbClr val="FFFFFF"/>
+                  </a:solidFill>
+                  <a:latin typeface="Arial"/>
+                  <a:ea typeface="Arial"/>
+                  <a:cs typeface="Arial"/>
+                  <a:sym typeface="Arial"/>
+                </a:rPr>
+                <a:t>Less waiting &amp; travel</a:t>
+              </a:r>
+              <a:endParaRPr sz="1600">
+                <a:solidFill>
+                  <a:schemeClr val="dk1"/>
+                </a:solidFill>
+                <a:latin typeface="Arial"/>
+                <a:ea typeface="Arial"/>
+                <a:cs typeface="Arial"/>
+                <a:sym typeface="Arial"/>
+              </a:endParaRPr>
+            </a:p>
+          </p:txBody>
+        </p:sp>
+        <p:sp>
+          <p:nvSpPr>
+            <p:cNvPr id="211" name="Google Shape;211;p7"/>
+            <p:cNvSpPr/>
+            <p:nvPr/>
+          </p:nvSpPr>
+          <p:spPr>
+            <a:xfrm>
+              <a:off x="9463552" y="2238383"/>
+              <a:ext cx="2203704" cy="685800"/>
+            </a:xfrm>
+            <a:prstGeom prst="rect">
+              <a:avLst/>
+            </a:prstGeom>
+            <a:noFill/>
+            <a:ln>
+              <a:noFill/>
+            </a:ln>
+          </p:spPr>
+          <p:txBody>
+            <a:bodyPr spcFirstLastPara="1" wrap="square" lIns="0" tIns="0" rIns="0" bIns="0" anchor="ctr" anchorCtr="0">
+              <a:noAutofit/>
+            </a:bodyPr>
+            <a:lstStyle/>
+            <a:p>
+              <a:pPr marL="0" marR="0" lvl="0" indent="0" algn="l" rtl="0">
+                <a:lnSpc>
+                  <a:spcPct val="150000"/>
+                </a:lnSpc>
+                <a:spcBef>
+                  <a:spcPts val="0"/>
+                </a:spcBef>
+                <a:spcAft>
+                  <a:spcPts val="0"/>
+                </a:spcAft>
+                <a:buClr>
+                  <a:srgbClr val="E3F5F2"/>
+                </a:buClr>
+                <a:buSzPts val="1600"/>
+                <a:buFont typeface="Arial"/>
+                <a:buNone/>
+              </a:pPr>
+              <a:r>
+                <a:rPr lang="en-IN" sz="1600">
+                  <a:solidFill>
+                    <a:srgbClr val="E3F5F2"/>
+                  </a:solidFill>
+                  <a:latin typeface="Arial"/>
+                  <a:ea typeface="Arial"/>
+                  <a:cs typeface="Arial"/>
+                  <a:sym typeface="Arial"/>
+                </a:rPr>
+                <a:t>No lost wages or long queues for a simple consultation.</a:t>
+              </a:r>
+              <a:endParaRPr sz="1600">
+                <a:solidFill>
+                  <a:schemeClr val="dk1"/>
+                </a:solidFill>
+                <a:latin typeface="Arial"/>
+                <a:ea typeface="Arial"/>
+                <a:cs typeface="Arial"/>
+                <a:sym typeface="Arial"/>
+              </a:endParaRPr>
+            </a:p>
+          </p:txBody>
+        </p:sp>
+      </p:grpSp>
+      <p:sp>
+        <p:nvSpPr>
+          <p:cNvPr id="212" name="Google Shape;212;p7"/>
+          <p:cNvSpPr/>
+          <p:nvPr/>
+        </p:nvSpPr>
+        <p:spPr>
+          <a:xfrm>
+            <a:off x="386119" y="3538487"/>
+            <a:ext cx="5486400" cy="365760"/>
+          </a:xfrm>
+          <a:prstGeom prst="rect">
+            <a:avLst/>
+          </a:prstGeom>
+          <a:noFill/>
+          <a:ln>
+            <a:noFill/>
+          </a:ln>
+        </p:spPr>
+        <p:txBody>
+          <a:bodyPr spcFirstLastPara="1" wrap="square" lIns="0" tIns="0" rIns="0" bIns="0" anchor="ctr" anchorCtr="0">
+            <a:noAutofit/>
+          </a:bodyPr>
+          <a:lstStyle/>
+          <a:p>
+            <a:pPr marL="0" marR="0" lvl="0" indent="0" algn="l" rtl="0">
+              <a:spcBef>
+                <a:spcPts val="0"/>
+              </a:spcBef>
+              <a:spcAft>
+                <a:spcPts val="0"/>
+              </a:spcAft>
+              <a:buClr>
+                <a:srgbClr val="02C39A"/>
+              </a:buClr>
+              <a:buSzPts val="2400"/>
+              <a:buFont typeface="Arial"/>
+              <a:buNone/>
+            </a:pPr>
+            <a:r>
+              <a:rPr lang="en-IN" sz="2400" b="1">
+                <a:solidFill>
+                  <a:srgbClr val="02C39A"/>
+                </a:solidFill>
+                <a:latin typeface="Arial"/>
+                <a:ea typeface="Arial"/>
+                <a:cs typeface="Arial"/>
+                <a:sym typeface="Arial"/>
+              </a:rPr>
+              <a:t>Future scope</a:t>
+            </a:r>
+            <a:endParaRPr sz="2400">
+              <a:solidFill>
+                <a:schemeClr val="dk1"/>
+              </a:solidFill>
+              <a:latin typeface="Arial"/>
+              <a:ea typeface="Arial"/>
+              <a:cs typeface="Arial"/>
+              <a:sym typeface="Arial"/>
+            </a:endParaRPr>
+          </a:p>
+        </p:txBody>
+      </p:sp>
+      <p:sp>
+        <p:nvSpPr>
+          <p:cNvPr id="213" name="Google Shape;213;p7"/>
+          <p:cNvSpPr/>
+          <p:nvPr/>
+        </p:nvSpPr>
+        <p:spPr>
+          <a:xfrm>
+            <a:off x="297425" y="4044050"/>
+            <a:ext cx="9018300" cy="2814000"/>
+          </a:xfrm>
+          <a:prstGeom prst="rect">
+            <a:avLst/>
+          </a:prstGeom>
+          <a:noFill/>
+          <a:ln>
+            <a:noFill/>
+          </a:ln>
+        </p:spPr>
+        <p:txBody>
+          <a:bodyPr spcFirstLastPara="1" wrap="square" lIns="0" tIns="0" rIns="0" bIns="0" anchor="ctr" anchorCtr="0">
+            <a:noAutofit/>
+          </a:bodyPr>
+          <a:lstStyle/>
+          <a:p>
+            <a:pPr marL="177800" marR="0" lvl="0" indent="-152400" algn="l" rtl="0">
+              <a:lnSpc>
+                <a:spcPct val="150000"/>
+              </a:lnSpc>
+              <a:spcBef>
+                <a:spcPts val="0"/>
+              </a:spcBef>
+              <a:spcAft>
+                <a:spcPts val="0"/>
+              </a:spcAft>
+              <a:buClr>
+                <a:schemeClr val="dk1"/>
+              </a:buClr>
+              <a:buSzPts val="1400"/>
+              <a:buFont typeface="Arial"/>
+              <a:buChar char="•"/>
+            </a:pPr>
+            <a:r>
+              <a:rPr lang="en-IN" dirty="0">
+                <a:solidFill>
+                  <a:schemeClr val="dk1"/>
+                </a:solidFill>
+                <a:latin typeface="Arial"/>
+                <a:ea typeface="Arial"/>
+                <a:cs typeface="Arial"/>
+                <a:sym typeface="Arial"/>
+              </a:rPr>
+              <a:t>Add more tests: blood sugar strips, ECG patch, basic eye &amp; hearing screening.</a:t>
+            </a:r>
+            <a:endParaRPr dirty="0">
+              <a:solidFill>
+                <a:schemeClr val="dk1"/>
+              </a:solidFill>
+              <a:latin typeface="Arial"/>
+              <a:ea typeface="Arial"/>
+              <a:cs typeface="Arial"/>
+              <a:sym typeface="Arial"/>
+            </a:endParaRPr>
+          </a:p>
+          <a:p>
+            <a:pPr marL="177800" marR="0" lvl="0" indent="-152400" algn="l" rtl="0">
+              <a:lnSpc>
+                <a:spcPct val="150000"/>
+              </a:lnSpc>
+              <a:spcBef>
+                <a:spcPts val="800"/>
+              </a:spcBef>
+              <a:spcAft>
+                <a:spcPts val="0"/>
+              </a:spcAft>
+              <a:buClr>
+                <a:schemeClr val="dk1"/>
+              </a:buClr>
+              <a:buSzPts val="1400"/>
+              <a:buFont typeface="Arial"/>
+              <a:buChar char="•"/>
+            </a:pPr>
+            <a:r>
+              <a:rPr lang="en-IN" dirty="0">
+                <a:solidFill>
+                  <a:schemeClr val="dk1"/>
+                </a:solidFill>
+                <a:latin typeface="Arial"/>
+                <a:ea typeface="Arial"/>
+                <a:cs typeface="Arial"/>
+                <a:sym typeface="Arial"/>
+              </a:rPr>
+              <a:t>Link every report to the patient's ABHA digital health record for lifelong history.</a:t>
+            </a:r>
+            <a:endParaRPr dirty="0">
+              <a:solidFill>
+                <a:schemeClr val="dk1"/>
+              </a:solidFill>
+              <a:latin typeface="Arial"/>
+              <a:ea typeface="Arial"/>
+              <a:cs typeface="Arial"/>
+              <a:sym typeface="Arial"/>
+            </a:endParaRPr>
+          </a:p>
+          <a:p>
+            <a:pPr marL="177800" marR="0" lvl="0" indent="-152400" algn="l" rtl="0">
+              <a:lnSpc>
+                <a:spcPct val="150000"/>
+              </a:lnSpc>
+              <a:spcBef>
+                <a:spcPts val="800"/>
+              </a:spcBef>
+              <a:spcAft>
+                <a:spcPts val="0"/>
+              </a:spcAft>
+              <a:buClr>
+                <a:schemeClr val="dk1"/>
+              </a:buClr>
+              <a:buSzPts val="1400"/>
+              <a:buFont typeface="Arial"/>
+              <a:buChar char="•"/>
+            </a:pPr>
+            <a:r>
+              <a:rPr lang="en-IN" dirty="0">
+                <a:solidFill>
+                  <a:schemeClr val="dk1"/>
+                </a:solidFill>
+                <a:latin typeface="Arial"/>
+                <a:ea typeface="Arial"/>
+                <a:cs typeface="Arial"/>
+                <a:sym typeface="Arial"/>
+              </a:rPr>
+              <a:t>Use anonymised village data to alert officials about disease outbreaks early.</a:t>
+            </a:r>
+            <a:endParaRPr dirty="0">
+              <a:solidFill>
+                <a:schemeClr val="dk1"/>
+              </a:solidFill>
+              <a:latin typeface="Arial"/>
+              <a:ea typeface="Arial"/>
+              <a:cs typeface="Arial"/>
+              <a:sym typeface="Arial"/>
+            </a:endParaRPr>
+          </a:p>
+          <a:p>
+            <a:pPr marL="177800" marR="0" lvl="0" indent="-152400" algn="l" rtl="0">
+              <a:lnSpc>
+                <a:spcPct val="150000"/>
+              </a:lnSpc>
+              <a:spcBef>
+                <a:spcPts val="800"/>
+              </a:spcBef>
+              <a:spcAft>
+                <a:spcPts val="0"/>
+              </a:spcAft>
+              <a:buClr>
+                <a:schemeClr val="dk1"/>
+              </a:buClr>
+              <a:buSzPts val="1400"/>
+              <a:buFont typeface="Arial"/>
+              <a:buChar char="•"/>
+            </a:pPr>
+            <a:r>
+              <a:rPr lang="en-IN" dirty="0">
+                <a:solidFill>
+                  <a:schemeClr val="dk1"/>
+                </a:solidFill>
+                <a:latin typeface="Arial"/>
+                <a:ea typeface="Arial"/>
+                <a:cs typeface="Arial"/>
+                <a:sym typeface="Arial"/>
+              </a:rPr>
+              <a:t>Solar power + offline mode so kiosks work even with weak electricity or internet.</a:t>
+            </a:r>
+            <a:endParaRPr dirty="0">
+              <a:solidFill>
+                <a:schemeClr val="dk1"/>
+              </a:solidFill>
+              <a:latin typeface="Arial"/>
+              <a:ea typeface="Arial"/>
+              <a:cs typeface="Arial"/>
+              <a:sym typeface="Arial"/>
+            </a:endParaRPr>
+          </a:p>
+          <a:p>
+            <a:pPr marL="177800" marR="0" lvl="0" indent="-152400" algn="l" rtl="0">
+              <a:lnSpc>
+                <a:spcPct val="150000"/>
+              </a:lnSpc>
+              <a:spcBef>
+                <a:spcPts val="800"/>
+              </a:spcBef>
+              <a:spcAft>
+                <a:spcPts val="0"/>
+              </a:spcAft>
+              <a:buClr>
+                <a:schemeClr val="dk1"/>
+              </a:buClr>
+              <a:buSzPts val="1400"/>
+              <a:buFont typeface="Arial"/>
+              <a:buChar char="•"/>
+            </a:pPr>
+            <a:r>
+              <a:rPr lang="en-IN" dirty="0">
+                <a:solidFill>
+                  <a:schemeClr val="dk1"/>
+                </a:solidFill>
+                <a:latin typeface="Arial"/>
+                <a:ea typeface="Arial"/>
+                <a:cs typeface="Arial"/>
+                <a:sym typeface="Arial"/>
+              </a:rPr>
+              <a:t>Scale from one village to a district-wide network run with local health workers (ASHAs)</a:t>
+            </a:r>
+            <a:endParaRPr dirty="0">
+              <a:solidFill>
+                <a:schemeClr val="dk1"/>
+              </a:solidFill>
+              <a:latin typeface="Arial"/>
+              <a:ea typeface="Arial"/>
+              <a:cs typeface="Arial"/>
+              <a:sym typeface="Arial"/>
+            </a:endParaRPr>
+          </a:p>
+          <a:p>
+            <a:pPr marL="177800" marR="0" lvl="0" indent="-152400" algn="l" rtl="0">
+              <a:lnSpc>
+                <a:spcPct val="150000"/>
+              </a:lnSpc>
+              <a:spcBef>
+                <a:spcPts val="800"/>
+              </a:spcBef>
+              <a:spcAft>
+                <a:spcPts val="0"/>
+              </a:spcAft>
+              <a:buClr>
+                <a:schemeClr val="dk1"/>
+              </a:buClr>
+              <a:buSzPts val="1400"/>
+              <a:buChar char="•"/>
+            </a:pPr>
+            <a:r>
+              <a:rPr lang="en-IN" dirty="0">
+                <a:solidFill>
+                  <a:schemeClr val="dk1"/>
+                </a:solidFill>
+              </a:rPr>
+              <a:t>External link:</a:t>
+            </a:r>
+            <a:endParaRPr dirty="0">
+              <a:solidFill>
+                <a:schemeClr val="dk1"/>
+              </a:solidFill>
+            </a:endParaRPr>
+          </a:p>
+          <a:p>
+            <a:pPr marL="457200" lvl="0" indent="-317500" algn="l" rtl="0">
+              <a:lnSpc>
+                <a:spcPct val="115000"/>
+              </a:lnSpc>
+              <a:spcBef>
+                <a:spcPts val="0"/>
+              </a:spcBef>
+              <a:spcAft>
+                <a:spcPts val="0"/>
+              </a:spcAft>
+              <a:buClr>
+                <a:schemeClr val="dk1"/>
+              </a:buClr>
+              <a:buSzPts val="1400"/>
+              <a:buChar char="•"/>
+            </a:pPr>
+            <a:r>
+              <a:rPr lang="en-IN" u="sng" dirty="0">
+                <a:solidFill>
+                  <a:srgbClr val="0000FF"/>
+                </a:solidFill>
+                <a:hlinkClick r:id="rId7">
+                  <a:extLst>
+                    <a:ext uri="{A12FA001-AC4F-418D-AE19-62706E023703}">
+                      <ahyp:hlinkClr xmlns:ahyp="http://schemas.microsoft.com/office/drawing/2018/hyperlinkcolor" val="tx"/>
+                    </a:ext>
+                  </a:extLst>
+                </a:hlinkClick>
+              </a:rPr>
+              <a:t>https://docs.google.com/document/d/1ZCZfzZupEzLPW2j9h5pHD_JS4Qk-SkGE9nn89oN3pU8/edit?tab=t.0</a:t>
+            </a:r>
+            <a:endParaRPr dirty="0">
+              <a:solidFill>
+                <a:schemeClr val="dk1"/>
+              </a:solidFill>
+            </a:endParaRPr>
+          </a:p>
+        </p:txBody>
+      </p:sp>
+      <p:grpSp>
+        <p:nvGrpSpPr>
+          <p:cNvPr id="214" name="Google Shape;214;p7"/>
+          <p:cNvGrpSpPr/>
+          <p:nvPr/>
+        </p:nvGrpSpPr>
+        <p:grpSpPr>
+          <a:xfrm>
+            <a:off x="9188754" y="3493120"/>
+            <a:ext cx="2898164" cy="1965960"/>
+            <a:chOff x="9188754" y="3493120"/>
+            <a:chExt cx="2898164" cy="1965960"/>
+          </a:xfrm>
+        </p:grpSpPr>
+        <p:sp>
+          <p:nvSpPr>
+            <p:cNvPr id="215" name="Google Shape;215;p7"/>
+            <p:cNvSpPr/>
+            <p:nvPr/>
+          </p:nvSpPr>
+          <p:spPr>
+            <a:xfrm>
+              <a:off x="9188754" y="3493120"/>
+              <a:ext cx="2880000" cy="1965960"/>
+            </a:xfrm>
+            <a:prstGeom prst="roundRect">
+              <a:avLst>
+                <a:gd name="adj" fmla="val 4651"/>
+              </a:avLst>
+            </a:prstGeom>
+            <a:solidFill>
+              <a:srgbClr val="028090"/>
+            </a:solidFill>
+            <a:ln>
+              <a:noFill/>
+            </a:ln>
+          </p:spPr>
+          <p:txBody>
+            <a:bodyPr spcFirstLastPara="1" wrap="square" lIns="91425" tIns="45700" rIns="91425" bIns="45700" anchor="t" anchorCtr="0">
+              <a:noAutofit/>
+            </a:bodyPr>
+            <a:lstStyle/>
+            <a:p>
+              <a:pPr marL="0" marR="0" lvl="0" indent="0" algn="l" rtl="0">
+                <a:spcBef>
+                  <a:spcPts val="0"/>
+                </a:spcBef>
+                <a:spcAft>
+                  <a:spcPts val="0"/>
+                </a:spcAft>
+                <a:buNone/>
+              </a:pPr>
+              <a:endParaRPr sz="1800">
+                <a:solidFill>
+                  <a:schemeClr val="dk1"/>
+                </a:solidFill>
+                <a:latin typeface="Arial"/>
+                <a:ea typeface="Arial"/>
+                <a:cs typeface="Arial"/>
+                <a:sym typeface="Arial"/>
+              </a:endParaRPr>
+            </a:p>
+          </p:txBody>
+        </p:sp>
+        <p:sp>
+          <p:nvSpPr>
+            <p:cNvPr id="216" name="Google Shape;216;p7"/>
+            <p:cNvSpPr/>
+            <p:nvPr/>
+          </p:nvSpPr>
+          <p:spPr>
+            <a:xfrm>
+              <a:off x="9266036" y="3681588"/>
+              <a:ext cx="502920" cy="502920"/>
+            </a:xfrm>
+            <a:prstGeom prst="ellipse">
+              <a:avLst/>
+            </a:prstGeom>
+            <a:solidFill>
+              <a:srgbClr val="02C39A"/>
+            </a:solidFill>
+            <a:ln>
+              <a:noFill/>
+            </a:ln>
+          </p:spPr>
+          <p:txBody>
+            <a:bodyPr spcFirstLastPara="1" wrap="square" lIns="91425" tIns="45700" rIns="91425" bIns="45700" anchor="t" anchorCtr="0">
+              <a:noAutofit/>
+            </a:bodyPr>
+            <a:lstStyle/>
+            <a:p>
+              <a:pPr marL="0" marR="0" lvl="0" indent="0" algn="l" rtl="0">
+                <a:spcBef>
+                  <a:spcPts val="0"/>
+                </a:spcBef>
+                <a:spcAft>
+                  <a:spcPts val="0"/>
+                </a:spcAft>
+                <a:buNone/>
+              </a:pPr>
+              <a:endParaRPr sz="1800">
+                <a:solidFill>
+                  <a:schemeClr val="dk1"/>
+                </a:solidFill>
+                <a:latin typeface="Arial"/>
+                <a:ea typeface="Arial"/>
+                <a:cs typeface="Arial"/>
+                <a:sym typeface="Arial"/>
+              </a:endParaRPr>
+            </a:p>
+          </p:txBody>
+        </p:sp>
+        <p:sp>
+          <p:nvSpPr>
+            <p:cNvPr id="217" name="Google Shape;217;p7"/>
+            <p:cNvSpPr/>
+            <p:nvPr/>
+          </p:nvSpPr>
+          <p:spPr>
+            <a:xfrm>
+              <a:off x="9883214" y="3717148"/>
+              <a:ext cx="2203704" cy="365760"/>
+            </a:xfrm>
+            <a:prstGeom prst="rect">
+              <a:avLst/>
+            </a:prstGeom>
+            <a:noFill/>
+            <a:ln>
+              <a:noFill/>
+            </a:ln>
+          </p:spPr>
+          <p:txBody>
+            <a:bodyPr spcFirstLastPara="1" wrap="square" lIns="0" tIns="0" rIns="0" bIns="0" anchor="ctr" anchorCtr="0">
+              <a:noAutofit/>
+            </a:bodyPr>
+            <a:lstStyle/>
+            <a:p>
+              <a:pPr marL="0" marR="0" lvl="0" indent="0" algn="l" rtl="0">
+                <a:spcBef>
+                  <a:spcPts val="0"/>
+                </a:spcBef>
+                <a:spcAft>
+                  <a:spcPts val="0"/>
+                </a:spcAft>
+                <a:buNone/>
+              </a:pPr>
+              <a:r>
+                <a:rPr lang="en-IN" sz="1600">
+                  <a:solidFill>
+                    <a:schemeClr val="lt1"/>
+                  </a:solidFill>
+                  <a:latin typeface="Arial"/>
+                  <a:ea typeface="Arial"/>
+                  <a:cs typeface="Arial"/>
+                  <a:sym typeface="Arial"/>
+                </a:rPr>
+                <a:t>Faster referrals</a:t>
+              </a:r>
+              <a:endParaRPr sz="1600">
+                <a:solidFill>
+                  <a:schemeClr val="lt1"/>
+                </a:solidFill>
+                <a:latin typeface="Arial"/>
+                <a:ea typeface="Arial"/>
+                <a:cs typeface="Arial"/>
+                <a:sym typeface="Arial"/>
+              </a:endParaRPr>
+            </a:p>
+          </p:txBody>
+        </p:sp>
+        <p:sp>
+          <p:nvSpPr>
+            <p:cNvPr id="218" name="Google Shape;218;p7"/>
+            <p:cNvSpPr/>
+            <p:nvPr/>
+          </p:nvSpPr>
+          <p:spPr>
+            <a:xfrm>
+              <a:off x="9463552" y="4408028"/>
+              <a:ext cx="2546366" cy="685800"/>
+            </a:xfrm>
+            <a:prstGeom prst="rect">
+              <a:avLst/>
+            </a:prstGeom>
+            <a:noFill/>
+            <a:ln>
+              <a:noFill/>
+            </a:ln>
+          </p:spPr>
+          <p:txBody>
+            <a:bodyPr spcFirstLastPara="1" wrap="square" lIns="0" tIns="0" rIns="0" bIns="0" anchor="ctr" anchorCtr="0">
+              <a:noAutofit/>
+            </a:bodyPr>
+            <a:lstStyle/>
+            <a:p>
+              <a:pPr marL="0" marR="0" lvl="0" indent="0" algn="l" rtl="0">
+                <a:lnSpc>
+                  <a:spcPct val="150000"/>
+                </a:lnSpc>
+                <a:spcBef>
+                  <a:spcPts val="0"/>
+                </a:spcBef>
+                <a:spcAft>
+                  <a:spcPts val="0"/>
+                </a:spcAft>
+                <a:buNone/>
+              </a:pPr>
+              <a:r>
+                <a:rPr lang="en-IN" sz="1600">
+                  <a:solidFill>
+                    <a:schemeClr val="lt1"/>
+                  </a:solidFill>
+                  <a:latin typeface="Arial"/>
+                  <a:ea typeface="Arial"/>
+                  <a:cs typeface="Arial"/>
+                  <a:sym typeface="Arial"/>
+                </a:rPr>
+                <a:t>Patients requiring examination can be directed to appropriate facilities.</a:t>
+              </a:r>
+              <a:endParaRPr sz="1600">
+                <a:solidFill>
+                  <a:schemeClr val="lt1"/>
+                </a:solidFill>
+                <a:latin typeface="Arial"/>
+                <a:ea typeface="Arial"/>
+                <a:cs typeface="Arial"/>
+                <a:sym typeface="Arial"/>
+              </a:endParaRPr>
+            </a:p>
+          </p:txBody>
+        </p:sp>
+        <p:sp>
+          <p:nvSpPr>
+            <p:cNvPr id="219" name="Google Shape;219;p7" descr="Abacus outline"/>
+            <p:cNvSpPr/>
+            <p:nvPr/>
+          </p:nvSpPr>
+          <p:spPr>
+            <a:xfrm>
+              <a:off x="9352070" y="3771855"/>
+              <a:ext cx="315119" cy="315119"/>
+            </a:xfrm>
+            <a:prstGeom prst="rect">
+              <a:avLst/>
+            </a:prstGeom>
+            <a:noFill/>
+            <a:ln>
+              <a:noFill/>
+            </a:ln>
+          </p:spPr>
+          <p:txBody>
+            <a:bodyPr/>
+            <a:lstStyle/>
+            <a:p>
+              <a:endParaRPr lang="en-IN"/>
+            </a:p>
+          </p:txBody>
+        </p:sp>
+      </p:grpSp>
+      <p:grpSp>
+        <p:nvGrpSpPr>
+          <p:cNvPr id="220" name="Google Shape;220;p7"/>
+          <p:cNvGrpSpPr/>
+          <p:nvPr/>
+        </p:nvGrpSpPr>
+        <p:grpSpPr>
+          <a:xfrm>
+            <a:off x="9170590" y="5680941"/>
+            <a:ext cx="2880000" cy="839125"/>
+            <a:chOff x="9170590" y="5680941"/>
+            <a:chExt cx="2880000" cy="839125"/>
+          </a:xfrm>
+        </p:grpSpPr>
+        <p:sp>
+          <p:nvSpPr>
+            <p:cNvPr id="221" name="Google Shape;221;p7"/>
+            <p:cNvSpPr/>
+            <p:nvPr/>
+          </p:nvSpPr>
+          <p:spPr>
+            <a:xfrm>
+              <a:off x="9170590" y="5680941"/>
+              <a:ext cx="2880000" cy="839125"/>
+            </a:xfrm>
+            <a:prstGeom prst="roundRect">
+              <a:avLst>
+                <a:gd name="adj" fmla="val 4651"/>
+              </a:avLst>
+            </a:prstGeom>
+            <a:solidFill>
+              <a:srgbClr val="028090"/>
+            </a:solidFill>
+            <a:ln>
+              <a:noFill/>
+            </a:ln>
+          </p:spPr>
+          <p:txBody>
+            <a:bodyPr spcFirstLastPara="1" wrap="square" lIns="91425" tIns="45700" rIns="91425" bIns="45700" anchor="t" anchorCtr="0">
+              <a:noAutofit/>
+            </a:bodyPr>
+            <a:lstStyle/>
+            <a:p>
+              <a:pPr marL="0" marR="0" lvl="0" indent="0" algn="l" rtl="0">
+                <a:spcBef>
+                  <a:spcPts val="0"/>
+                </a:spcBef>
+                <a:spcAft>
+                  <a:spcPts val="0"/>
+                </a:spcAft>
+                <a:buNone/>
+              </a:pPr>
+              <a:endParaRPr sz="1800">
+                <a:solidFill>
+                  <a:schemeClr val="dk1"/>
+                </a:solidFill>
+                <a:latin typeface="Arial"/>
+                <a:ea typeface="Arial"/>
+                <a:cs typeface="Arial"/>
+                <a:sym typeface="Arial"/>
+              </a:endParaRPr>
+            </a:p>
+          </p:txBody>
+        </p:sp>
+        <p:sp>
+          <p:nvSpPr>
+            <p:cNvPr id="222" name="Google Shape;222;p7"/>
+            <p:cNvSpPr/>
+            <p:nvPr/>
+          </p:nvSpPr>
+          <p:spPr>
+            <a:xfrm>
+              <a:off x="9228533" y="5836389"/>
+              <a:ext cx="448056" cy="448056"/>
+            </a:xfrm>
+            <a:prstGeom prst="ellipse">
+              <a:avLst/>
+            </a:prstGeom>
+            <a:solidFill>
+              <a:srgbClr val="02C39A"/>
+            </a:solidFill>
+            <a:ln>
+              <a:noFill/>
+            </a:ln>
+          </p:spPr>
+          <p:txBody>
+            <a:bodyPr spcFirstLastPara="1" wrap="square" lIns="91425" tIns="45700" rIns="91425" bIns="45700" anchor="t" anchorCtr="0">
+              <a:noAutofit/>
+            </a:bodyPr>
+            <a:lstStyle/>
+            <a:p>
+              <a:pPr marL="0" marR="0" lvl="0" indent="0" algn="l" rtl="0">
+                <a:spcBef>
+                  <a:spcPts val="0"/>
+                </a:spcBef>
+                <a:spcAft>
+                  <a:spcPts val="0"/>
+                </a:spcAft>
+                <a:buNone/>
+              </a:pPr>
+              <a:endParaRPr sz="1800">
+                <a:solidFill>
+                  <a:schemeClr val="dk1"/>
+                </a:solidFill>
+                <a:latin typeface="Arial"/>
+                <a:ea typeface="Arial"/>
+                <a:cs typeface="Arial"/>
+                <a:sym typeface="Arial"/>
+              </a:endParaRPr>
+            </a:p>
+          </p:txBody>
+        </p:sp>
+        <p:sp>
+          <p:nvSpPr>
+            <p:cNvPr id="223" name="Google Shape;223;p7"/>
+            <p:cNvSpPr/>
+            <p:nvPr/>
+          </p:nvSpPr>
+          <p:spPr>
+            <a:xfrm>
+              <a:off x="9723082" y="5865707"/>
+              <a:ext cx="2326950" cy="365760"/>
+            </a:xfrm>
+            <a:prstGeom prst="rect">
+              <a:avLst/>
+            </a:prstGeom>
+            <a:noFill/>
+            <a:ln>
+              <a:noFill/>
+            </a:ln>
+          </p:spPr>
+          <p:txBody>
+            <a:bodyPr spcFirstLastPara="1" wrap="square" lIns="0" tIns="0" rIns="0" bIns="0" anchor="ctr" anchorCtr="0">
+              <a:noAutofit/>
+            </a:bodyPr>
+            <a:lstStyle/>
+            <a:p>
+              <a:pPr marL="0" marR="0" lvl="0" indent="0" algn="l" rtl="0">
+                <a:spcBef>
+                  <a:spcPts val="0"/>
+                </a:spcBef>
+                <a:spcAft>
+                  <a:spcPts val="0"/>
+                </a:spcAft>
+                <a:buNone/>
+              </a:pPr>
+              <a:r>
+                <a:rPr lang="en-IN" sz="1600">
+                  <a:solidFill>
+                    <a:schemeClr val="lt1"/>
+                  </a:solidFill>
+                  <a:latin typeface="Arial"/>
+                  <a:ea typeface="Arial"/>
+                  <a:cs typeface="Arial"/>
+                  <a:sym typeface="Arial"/>
+                </a:rPr>
+                <a:t>AI assists. Doctor decides.</a:t>
+              </a:r>
+              <a:endParaRPr sz="1600">
+                <a:solidFill>
+                  <a:schemeClr val="lt1"/>
+                </a:solidFill>
+                <a:latin typeface="Arial"/>
+                <a:ea typeface="Arial"/>
+                <a:cs typeface="Arial"/>
+                <a:sym typeface="Arial"/>
+              </a:endParaRPr>
+            </a:p>
+          </p:txBody>
+        </p:sp>
+        <p:sp>
+          <p:nvSpPr>
+            <p:cNvPr id="224" name="Google Shape;224;p7" descr="Address Book outline"/>
+            <p:cNvSpPr/>
+            <p:nvPr/>
+          </p:nvSpPr>
+          <p:spPr>
+            <a:xfrm>
+              <a:off x="9285613" y="5896534"/>
+              <a:ext cx="334933" cy="334933"/>
+            </a:xfrm>
+            <a:prstGeom prst="rect">
+              <a:avLst/>
+            </a:prstGeom>
+            <a:noFill/>
+            <a:ln>
+              <a:noFill/>
+            </a:ln>
+          </p:spPr>
+          <p:txBody>
+            <a:bodyPr/>
+            <a:lstStyle/>
+            <a:p>
+              <a:endParaRPr lang="en-IN"/>
+            </a:p>
+          </p:txBody>
+        </p:sp>
+      </p:grpSp>
+    </p:spTree>
+  </p:cSld>
+  <p:clrMapOvr>
+    <a:masterClrMapping/>
+  </p:clrMapOvr>
+</p:sld>
+</file>
+
+<file path=ppt/slides/slide11.xml><?xml version="1.0" encoding="utf-8"?>
+<p:sld xmlns:a="http://schemas.openxmlformats.org/drawingml/2006/main" xmlns:r="http://schemas.openxmlformats.org/officeDocument/2006/relationships" xmlns:p="http://schemas.openxmlformats.org/presentationml/2006/main">
+  <p:cSld>
+    <p:spTree>
+      <p:nvGrpSpPr>
         <p:cNvPr id="1" name=""/>
         <p:cNvGrpSpPr/>
         <p:nvPr/>
@@ -8448,12 +9597,18 @@
 </p:sld>
 </file>
 
-<file path=ppt/slides/slide11.xml><?xml version="1.0" encoding="utf-8"?>
+<file path=ppt/slides/slide12.xml><?xml version="1.0" encoding="utf-8"?>
 <p:sld xmlns:a="http://schemas.openxmlformats.org/drawingml/2006/main" xmlns:r="http://schemas.openxmlformats.org/officeDocument/2006/relationships" xmlns:p="http://schemas.openxmlformats.org/presentationml/2006/main">
   <p:cSld>
     <p:spTree>
       <p:nvGrpSpPr>
-        <p:cNvPr id="1" name="Shape 228"/>
+        <p:cNvPr id="1" name="Shape 228">
+          <a:extLst>
+            <a:ext uri="{FF2B5EF4-FFF2-40B4-BE49-F238E27FC236}">
+              <a16:creationId xmlns:a16="http://schemas.microsoft.com/office/drawing/2014/main" id="{A4916F09-B289-931D-E13A-887F37817BBC}"/>
+            </a:ext>
+          </a:extLst>
+        </p:cNvPr>
         <p:cNvGrpSpPr/>
         <p:nvPr/>
       </p:nvGrpSpPr>
@@ -8467,7 +9622,13 @@
       </p:grpSpPr>
       <p:sp>
         <p:nvSpPr>
-          <p:cNvPr id="229" name="Google Shape;229;p8"/>
+          <p:cNvPr id="229" name="Google Shape;229;p8">
+            <a:extLst>
+              <a:ext uri="{FF2B5EF4-FFF2-40B4-BE49-F238E27FC236}">
+                <a16:creationId xmlns:a16="http://schemas.microsoft.com/office/drawing/2014/main" id="{F6797F81-3852-6E6E-1E94-DCC5F8E3C0E7}"/>
+              </a:ext>
+            </a:extLst>
+          </p:cNvPr>
           <p:cNvSpPr txBox="1">
             <a:spLocks noGrp="1"/>
           </p:cNvSpPr>
@@ -8519,6 +9680,11 @@
         </p:txBody>
       </p:sp>
     </p:spTree>
+    <p:extLst>
+      <p:ext uri="{BB962C8B-B14F-4D97-AF65-F5344CB8AC3E}">
+        <p14:creationId xmlns:p14="http://schemas.microsoft.com/office/powerpoint/2010/main" val="1722776440"/>
+      </p:ext>
+    </p:extLst>
   </p:cSld>
   <p:clrMapOvr>
     <a:masterClrMapping/>
@@ -11853,23 +13019,7 @@
                   <a:schemeClr val="dk1"/>
                 </a:solidFill>
               </a:rPr>
-              <a:t> body temperature, blood </a:t>
-            </a:r>
-            <a:r>
-              <a:rPr lang="en-IN" dirty="0" err="1">
-                <a:solidFill>
-                  <a:schemeClr val="dk1"/>
-                </a:solidFill>
-              </a:rPr>
-              <a:t>pressure,heart</a:t>
-            </a:r>
-            <a:r>
-              <a:rPr lang="en-IN" dirty="0">
-                <a:solidFill>
-                  <a:schemeClr val="dk1"/>
-                </a:solidFill>
-              </a:rPr>
-              <a:t> rate. </a:t>
+              <a:t> body temperature, blood pressure, heart rate. </a:t>
             </a:r>
             <a:endParaRPr dirty="0">
               <a:solidFill>
@@ -12548,7 +13698,7 @@
                 <a:buNone/>
               </a:pPr>
               <a:r>
-                <a:rPr lang="en-IN" sz="2000" b="1">
+                <a:rPr lang="en-IN" sz="2000" b="1" dirty="0">
                   <a:solidFill>
                     <a:srgbClr val="D7EAE8"/>
                   </a:solidFill>
@@ -12560,7 +13710,7 @@
                 <a:t>Prototype plan</a:t>
               </a:r>
               <a:r>
-                <a:rPr lang="en-IN" sz="2000">
+                <a:rPr lang="en-IN" sz="2000" dirty="0">
                   <a:solidFill>
                     <a:srgbClr val="D7EAE8"/>
                   </a:solidFill>
@@ -12569,9 +13719,9 @@
                   <a:cs typeface="Calibri"/>
                   <a:sym typeface="Calibri"/>
                 </a:rPr>
-                <a:t>: a tabletop model using a Raspberry Pi, off-the-shelf BP monitor &amp; pulse oximeter, a speech-to-text API with an LLM chatbot in Kannada/Hindi, a slip printer  and a person role-playing the online doctor.</a:t>
+                <a:t>: a tabletop model using a Raspberry Pi, off-the-shelf BP monitor &amp; pulse oximeter, a speech-to-text API with an LLM chatbot in the native language in the region, a slip printer.</a:t>
               </a:r>
-              <a:endParaRPr sz="2000">
+              <a:endParaRPr sz="2000" dirty="0">
                 <a:solidFill>
                   <a:schemeClr val="dk1"/>
                 </a:solidFill>
@@ -13662,6 +14812,82 @@
 </file>
 
 <file path=ppt/slides/slide6.xml><?xml version="1.0" encoding="utf-8"?>
+<p:sld xmlns:a="http://schemas.openxmlformats.org/drawingml/2006/main" xmlns:r="http://schemas.openxmlformats.org/officeDocument/2006/relationships" xmlns:p="http://schemas.openxmlformats.org/presentationml/2006/main">
+  <p:cSld>
+    <p:spTree>
+      <p:nvGrpSpPr>
+        <p:cNvPr id="1" name="Shape 228"/>
+        <p:cNvGrpSpPr/>
+        <p:nvPr/>
+      </p:nvGrpSpPr>
+      <p:grpSpPr>
+        <a:xfrm>
+          <a:off x="0" y="0"/>
+          <a:ext cx="0" cy="0"/>
+          <a:chOff x="0" y="0"/>
+          <a:chExt cx="0" cy="0"/>
+        </a:xfrm>
+      </p:grpSpPr>
+      <p:sp>
+        <p:nvSpPr>
+          <p:cNvPr id="3" name="Rectangle: Rounded Corners 2">
+            <a:extLst>
+              <a:ext uri="{FF2B5EF4-FFF2-40B4-BE49-F238E27FC236}">
+                <a16:creationId xmlns:a16="http://schemas.microsoft.com/office/drawing/2014/main" id="{81702310-6E98-06FE-2C0A-C5C0FE5FFF05}"/>
+              </a:ext>
+            </a:extLst>
+          </p:cNvPr>
+          <p:cNvSpPr/>
+          <p:nvPr/>
+        </p:nvSpPr>
+        <p:spPr>
+          <a:xfrm>
+            <a:off x="4192966" y="2069690"/>
+            <a:ext cx="3806068" cy="2718620"/>
+          </a:xfrm>
+          <a:prstGeom prst="roundRect">
+            <a:avLst>
+              <a:gd name="adj" fmla="val 42029"/>
+            </a:avLst>
+          </a:prstGeom>
+        </p:spPr>
+        <p:style>
+          <a:lnRef idx="2">
+            <a:schemeClr val="accent1">
+              <a:shade val="15000"/>
+            </a:schemeClr>
+          </a:lnRef>
+          <a:fillRef idx="1">
+            <a:schemeClr val="accent1"/>
+          </a:fillRef>
+          <a:effectRef idx="0">
+            <a:schemeClr val="accent1"/>
+          </a:effectRef>
+          <a:fontRef idx="minor">
+            <a:schemeClr val="lt1"/>
+          </a:fontRef>
+        </p:style>
+        <p:txBody>
+          <a:bodyPr rtlCol="0" anchor="ctr"/>
+          <a:lstStyle/>
+          <a:p>
+            <a:pPr algn="ctr"/>
+            <a:r>
+              <a:rPr lang="en-IN" sz="5400" dirty="0"/>
+              <a:t>DEMO</a:t>
+            </a:r>
+          </a:p>
+        </p:txBody>
+      </p:sp>
+    </p:spTree>
+  </p:cSld>
+  <p:clrMapOvr>
+    <a:masterClrMapping/>
+  </p:clrMapOvr>
+</p:sld>
+</file>
+
+<file path=ppt/slides/slide7.xml><?xml version="1.0" encoding="utf-8"?>
 <p:sld xmlns:a="http://schemas.openxmlformats.org/drawingml/2006/main" xmlns:r="http://schemas.openxmlformats.org/officeDocument/2006/relationships" xmlns:p="http://schemas.openxmlformats.org/presentationml/2006/main">
   <p:cSld>
     <p:spTree>
@@ -15495,7 +16721,7 @@
 </p:sld>
 </file>
 
-<file path=ppt/slides/slide7.xml><?xml version="1.0" encoding="utf-8"?>
+<file path=ppt/slides/slide8.xml><?xml version="1.0" encoding="utf-8"?>
 <p:sld xmlns:a="http://schemas.openxmlformats.org/drawingml/2006/main" xmlns:r="http://schemas.openxmlformats.org/officeDocument/2006/relationships" xmlns:p="http://schemas.openxmlformats.org/presentationml/2006/main">
   <p:cSld>
     <p:spTree>
@@ -17205,7 +18431,7 @@
               </a:r>
               <a:r>
                 <a:rPr lang="en-IN" sz="1600" dirty="0"/>
-                <a:t>: Medi-phi was used to process user data; </a:t>
+                <a:t>: Medi-phi is used to process user data; </a:t>
               </a:r>
               <a:r>
                 <a:rPr lang="en-IN" sz="1600" dirty="0" err="1"/>
@@ -17588,7 +18814,7 @@
 </p:sld>
 </file>
 
-<file path=ppt/slides/slide8.xml><?xml version="1.0" encoding="utf-8"?>
+<file path=ppt/slides/slide9.xml><?xml version="1.0" encoding="utf-8"?>
 <p:sld xmlns:a="http://schemas.openxmlformats.org/drawingml/2006/main" xmlns:r="http://schemas.openxmlformats.org/officeDocument/2006/relationships" xmlns:p="http://schemas.openxmlformats.org/presentationml/2006/main">
   <p:cSld>
     <p:spTree>
@@ -19610,1936 +20836,6 @@
 </p:sld>
 </file>
 
-<file path=ppt/slides/slide9.xml><?xml version="1.0" encoding="utf-8"?>
-<p:sld xmlns:a="http://schemas.openxmlformats.org/drawingml/2006/main" xmlns:r="http://schemas.openxmlformats.org/officeDocument/2006/relationships" xmlns:p="http://schemas.openxmlformats.org/presentationml/2006/main">
-  <p:cSld>
-    <p:spTree>
-      <p:nvGrpSpPr>
-        <p:cNvPr id="1" name="Shape 189"/>
-        <p:cNvGrpSpPr/>
-        <p:nvPr/>
-      </p:nvGrpSpPr>
-      <p:grpSpPr>
-        <a:xfrm>
-          <a:off x="0" y="0"/>
-          <a:ext cx="0" cy="0"/>
-          <a:chOff x="0" y="0"/>
-          <a:chExt cx="0" cy="0"/>
-        </a:xfrm>
-      </p:grpSpPr>
-      <p:sp>
-        <p:nvSpPr>
-          <p:cNvPr id="190" name="Google Shape;190;p7"/>
-          <p:cNvSpPr txBox="1">
-            <a:spLocks noGrp="1"/>
-          </p:cNvSpPr>
-          <p:nvPr>
-            <p:ph type="title"/>
-          </p:nvPr>
-        </p:nvSpPr>
-        <p:spPr>
-          <a:xfrm>
-            <a:off x="0" y="18255"/>
-            <a:ext cx="10515600" cy="1325563"/>
-          </a:xfrm>
-          <a:prstGeom prst="rect">
-            <a:avLst/>
-          </a:prstGeom>
-          <a:noFill/>
-          <a:ln>
-            <a:noFill/>
-          </a:ln>
-        </p:spPr>
-        <p:txBody>
-          <a:bodyPr spcFirstLastPara="1" wrap="square" lIns="91425" tIns="45700" rIns="91425" bIns="45700" anchor="ctr" anchorCtr="0">
-            <a:normAutofit/>
-          </a:bodyPr>
-          <a:lstStyle/>
-          <a:p>
-            <a:pPr marL="0" lvl="0" indent="0" algn="l" rtl="0">
-              <a:lnSpc>
-                <a:spcPct val="90000"/>
-              </a:lnSpc>
-              <a:spcBef>
-                <a:spcPts val="0"/>
-              </a:spcBef>
-              <a:spcAft>
-                <a:spcPts val="0"/>
-              </a:spcAft>
-              <a:buClr>
-                <a:schemeClr val="dk1"/>
-              </a:buClr>
-              <a:buSzPts val="4400"/>
-              <a:buFont typeface="Arial"/>
-              <a:buNone/>
-            </a:pPr>
-            <a:r>
-              <a:rPr lang="en-IN" dirty="0">
-                <a:latin typeface="Arial"/>
-                <a:ea typeface="Arial"/>
-                <a:cs typeface="Arial"/>
-                <a:sym typeface="Arial"/>
-              </a:rPr>
-              <a:t> Impact &amp; Future Scope</a:t>
-            </a:r>
-            <a:endParaRPr dirty="0"/>
-          </a:p>
-        </p:txBody>
-      </p:sp>
-      <p:grpSp>
-        <p:nvGrpSpPr>
-          <p:cNvPr id="191" name="Google Shape;191;p7"/>
-          <p:cNvGrpSpPr/>
-          <p:nvPr/>
-        </p:nvGrpSpPr>
-        <p:grpSpPr>
-          <a:xfrm>
-            <a:off x="312819" y="1323475"/>
-            <a:ext cx="11755935" cy="1965960"/>
-            <a:chOff x="312819" y="1323475"/>
-            <a:chExt cx="11755935" cy="1965960"/>
-          </a:xfrm>
-        </p:grpSpPr>
-        <p:sp>
-          <p:nvSpPr>
-            <p:cNvPr id="192" name="Google Shape;192;p7"/>
-            <p:cNvSpPr/>
-            <p:nvPr/>
-          </p:nvSpPr>
-          <p:spPr>
-            <a:xfrm>
-              <a:off x="312819" y="1323475"/>
-              <a:ext cx="2880000" cy="1965960"/>
-            </a:xfrm>
-            <a:prstGeom prst="roundRect">
-              <a:avLst>
-                <a:gd name="adj" fmla="val 4651"/>
-              </a:avLst>
-            </a:prstGeom>
-            <a:solidFill>
-              <a:srgbClr val="028090"/>
-            </a:solidFill>
-            <a:ln>
-              <a:noFill/>
-            </a:ln>
-          </p:spPr>
-          <p:txBody>
-            <a:bodyPr spcFirstLastPara="1" wrap="square" lIns="91425" tIns="45700" rIns="91425" bIns="45700" anchor="t" anchorCtr="0">
-              <a:noAutofit/>
-            </a:bodyPr>
-            <a:lstStyle/>
-            <a:p>
-              <a:pPr marL="0" marR="0" lvl="0" indent="0" algn="l" rtl="0">
-                <a:spcBef>
-                  <a:spcPts val="0"/>
-                </a:spcBef>
-                <a:spcAft>
-                  <a:spcPts val="0"/>
-                </a:spcAft>
-                <a:buNone/>
-              </a:pPr>
-              <a:endParaRPr sz="1800">
-                <a:solidFill>
-                  <a:schemeClr val="dk1"/>
-                </a:solidFill>
-                <a:latin typeface="Arial"/>
-                <a:ea typeface="Arial"/>
-                <a:cs typeface="Arial"/>
-                <a:sym typeface="Arial"/>
-              </a:endParaRPr>
-            </a:p>
-          </p:txBody>
-        </p:sp>
-        <p:sp>
-          <p:nvSpPr>
-            <p:cNvPr id="193" name="Google Shape;193;p7"/>
-            <p:cNvSpPr/>
-            <p:nvPr/>
-          </p:nvSpPr>
-          <p:spPr>
-            <a:xfrm>
-              <a:off x="513987" y="1524643"/>
-              <a:ext cx="502920" cy="502920"/>
-            </a:xfrm>
-            <a:prstGeom prst="ellipse">
-              <a:avLst/>
-            </a:prstGeom>
-            <a:solidFill>
-              <a:srgbClr val="02C39A"/>
-            </a:solidFill>
-            <a:ln>
-              <a:noFill/>
-            </a:ln>
-          </p:spPr>
-          <p:txBody>
-            <a:bodyPr spcFirstLastPara="1" wrap="square" lIns="91425" tIns="45700" rIns="91425" bIns="45700" anchor="t" anchorCtr="0">
-              <a:noAutofit/>
-            </a:bodyPr>
-            <a:lstStyle/>
-            <a:p>
-              <a:pPr marL="0" marR="0" lvl="0" indent="0" algn="l" rtl="0">
-                <a:spcBef>
-                  <a:spcPts val="0"/>
-                </a:spcBef>
-                <a:spcAft>
-                  <a:spcPts val="0"/>
-                </a:spcAft>
-                <a:buNone/>
-              </a:pPr>
-              <a:endParaRPr sz="1800">
-                <a:solidFill>
-                  <a:schemeClr val="dk1"/>
-                </a:solidFill>
-                <a:latin typeface="Arial"/>
-                <a:ea typeface="Arial"/>
-                <a:cs typeface="Arial"/>
-                <a:sym typeface="Arial"/>
-              </a:endParaRPr>
-            </a:p>
-          </p:txBody>
-        </p:sp>
-        <p:pic>
-          <p:nvPicPr>
-            <p:cNvPr id="194" name="Google Shape;194;p7" descr="preencoded.png"/>
-            <p:cNvPicPr preferRelativeResize="0"/>
-            <p:nvPr/>
-          </p:nvPicPr>
-          <p:blipFill rotWithShape="1">
-            <a:blip r:embed="rId3">
-              <a:alphaModFix/>
-            </a:blip>
-            <a:srcRect/>
-            <a:stretch/>
-          </p:blipFill>
-          <p:spPr>
-            <a:xfrm>
-              <a:off x="614571" y="1625227"/>
-              <a:ext cx="301752" cy="301752"/>
-            </a:xfrm>
-            <a:prstGeom prst="rect">
-              <a:avLst/>
-            </a:prstGeom>
-            <a:noFill/>
-            <a:ln>
-              <a:noFill/>
-            </a:ln>
-          </p:spPr>
-        </p:pic>
-        <p:sp>
-          <p:nvSpPr>
-            <p:cNvPr id="195" name="Google Shape;195;p7"/>
-            <p:cNvSpPr/>
-            <p:nvPr/>
-          </p:nvSpPr>
-          <p:spPr>
-            <a:xfrm>
-              <a:off x="1218075" y="1561219"/>
-              <a:ext cx="2203704" cy="365760"/>
-            </a:xfrm>
-            <a:prstGeom prst="rect">
-              <a:avLst/>
-            </a:prstGeom>
-            <a:noFill/>
-            <a:ln>
-              <a:noFill/>
-            </a:ln>
-          </p:spPr>
-          <p:txBody>
-            <a:bodyPr spcFirstLastPara="1" wrap="square" lIns="0" tIns="0" rIns="0" bIns="0" anchor="ctr" anchorCtr="0">
-              <a:noAutofit/>
-            </a:bodyPr>
-            <a:lstStyle/>
-            <a:p>
-              <a:pPr marL="0" marR="0" lvl="0" indent="0" algn="l" rtl="0">
-                <a:spcBef>
-                  <a:spcPts val="0"/>
-                </a:spcBef>
-                <a:spcAft>
-                  <a:spcPts val="0"/>
-                </a:spcAft>
-                <a:buClr>
-                  <a:srgbClr val="FFFFFF"/>
-                </a:buClr>
-                <a:buSzPts val="1600"/>
-                <a:buFont typeface="Arial"/>
-                <a:buNone/>
-              </a:pPr>
-              <a:r>
-                <a:rPr lang="en-IN" sz="1600" b="1">
-                  <a:solidFill>
-                    <a:srgbClr val="FFFFFF"/>
-                  </a:solidFill>
-                  <a:latin typeface="Arial"/>
-                  <a:ea typeface="Arial"/>
-                  <a:cs typeface="Arial"/>
-                  <a:sym typeface="Arial"/>
-                </a:rPr>
-                <a:t>Faster healthcare</a:t>
-              </a:r>
-              <a:endParaRPr sz="1600">
-                <a:solidFill>
-                  <a:schemeClr val="dk1"/>
-                </a:solidFill>
-                <a:latin typeface="Arial"/>
-                <a:ea typeface="Arial"/>
-                <a:cs typeface="Arial"/>
-                <a:sym typeface="Arial"/>
-              </a:endParaRPr>
-            </a:p>
-          </p:txBody>
-        </p:sp>
-        <p:sp>
-          <p:nvSpPr>
-            <p:cNvPr id="196" name="Google Shape;196;p7"/>
-            <p:cNvSpPr/>
-            <p:nvPr/>
-          </p:nvSpPr>
-          <p:spPr>
-            <a:xfrm>
-              <a:off x="674834" y="2265307"/>
-              <a:ext cx="2203704" cy="685800"/>
-            </a:xfrm>
-            <a:prstGeom prst="rect">
-              <a:avLst/>
-            </a:prstGeom>
-            <a:noFill/>
-            <a:ln>
-              <a:noFill/>
-            </a:ln>
-          </p:spPr>
-          <p:txBody>
-            <a:bodyPr spcFirstLastPara="1" wrap="square" lIns="0" tIns="0" rIns="0" bIns="0" anchor="ctr" anchorCtr="0">
-              <a:noAutofit/>
-            </a:bodyPr>
-            <a:lstStyle/>
-            <a:p>
-              <a:pPr marL="0" marR="0" lvl="0" indent="0" algn="l" rtl="0">
-                <a:lnSpc>
-                  <a:spcPct val="150000"/>
-                </a:lnSpc>
-                <a:spcBef>
-                  <a:spcPts val="0"/>
-                </a:spcBef>
-                <a:spcAft>
-                  <a:spcPts val="0"/>
-                </a:spcAft>
-                <a:buClr>
-                  <a:srgbClr val="E3F5F2"/>
-                </a:buClr>
-                <a:buSzPts val="1600"/>
-                <a:buFont typeface="Arial"/>
-                <a:buNone/>
-              </a:pPr>
-              <a:r>
-                <a:rPr lang="en-IN" sz="1600">
-                  <a:solidFill>
-                    <a:srgbClr val="E3F5F2"/>
-                  </a:solidFill>
-                  <a:latin typeface="Arial"/>
-                  <a:ea typeface="Arial"/>
-                  <a:cs typeface="Arial"/>
-                  <a:sym typeface="Arial"/>
-                </a:rPr>
-                <a:t>First-level check-up in minutes, right inside the village.</a:t>
-              </a:r>
-              <a:endParaRPr sz="1600">
-                <a:solidFill>
-                  <a:schemeClr val="dk1"/>
-                </a:solidFill>
-                <a:latin typeface="Arial"/>
-                <a:ea typeface="Arial"/>
-                <a:cs typeface="Arial"/>
-                <a:sym typeface="Arial"/>
-              </a:endParaRPr>
-            </a:p>
-          </p:txBody>
-        </p:sp>
-        <p:sp>
-          <p:nvSpPr>
-            <p:cNvPr id="197" name="Google Shape;197;p7"/>
-            <p:cNvSpPr/>
-            <p:nvPr/>
-          </p:nvSpPr>
-          <p:spPr>
-            <a:xfrm>
-              <a:off x="3254300" y="1323475"/>
-              <a:ext cx="2880000" cy="1965960"/>
-            </a:xfrm>
-            <a:prstGeom prst="roundRect">
-              <a:avLst>
-                <a:gd name="adj" fmla="val 4651"/>
-              </a:avLst>
-            </a:prstGeom>
-            <a:solidFill>
-              <a:srgbClr val="028090"/>
-            </a:solidFill>
-            <a:ln>
-              <a:noFill/>
-            </a:ln>
-          </p:spPr>
-          <p:txBody>
-            <a:bodyPr spcFirstLastPara="1" wrap="square" lIns="91425" tIns="45700" rIns="91425" bIns="45700" anchor="t" anchorCtr="0">
-              <a:noAutofit/>
-            </a:bodyPr>
-            <a:lstStyle/>
-            <a:p>
-              <a:pPr marL="0" marR="0" lvl="0" indent="0" algn="l" rtl="0">
-                <a:spcBef>
-                  <a:spcPts val="0"/>
-                </a:spcBef>
-                <a:spcAft>
-                  <a:spcPts val="0"/>
-                </a:spcAft>
-                <a:buNone/>
-              </a:pPr>
-              <a:endParaRPr sz="1800">
-                <a:solidFill>
-                  <a:schemeClr val="dk1"/>
-                </a:solidFill>
-                <a:latin typeface="Arial"/>
-                <a:ea typeface="Arial"/>
-                <a:cs typeface="Arial"/>
-                <a:sym typeface="Arial"/>
-              </a:endParaRPr>
-            </a:p>
-          </p:txBody>
-        </p:sp>
-        <p:sp>
-          <p:nvSpPr>
-            <p:cNvPr id="198" name="Google Shape;198;p7"/>
-            <p:cNvSpPr/>
-            <p:nvPr/>
-          </p:nvSpPr>
-          <p:spPr>
-            <a:xfrm>
-              <a:off x="3330339" y="1524643"/>
-              <a:ext cx="502920" cy="502920"/>
-            </a:xfrm>
-            <a:prstGeom prst="ellipse">
-              <a:avLst/>
-            </a:prstGeom>
-            <a:solidFill>
-              <a:srgbClr val="02C39A"/>
-            </a:solidFill>
-            <a:ln>
-              <a:noFill/>
-            </a:ln>
-          </p:spPr>
-          <p:txBody>
-            <a:bodyPr spcFirstLastPara="1" wrap="square" lIns="91425" tIns="45700" rIns="91425" bIns="45700" anchor="t" anchorCtr="0">
-              <a:noAutofit/>
-            </a:bodyPr>
-            <a:lstStyle/>
-            <a:p>
-              <a:pPr marL="0" marR="0" lvl="0" indent="0" algn="l" rtl="0">
-                <a:spcBef>
-                  <a:spcPts val="0"/>
-                </a:spcBef>
-                <a:spcAft>
-                  <a:spcPts val="0"/>
-                </a:spcAft>
-                <a:buNone/>
-              </a:pPr>
-              <a:endParaRPr sz="1800">
-                <a:solidFill>
-                  <a:schemeClr val="dk1"/>
-                </a:solidFill>
-                <a:latin typeface="Arial"/>
-                <a:ea typeface="Arial"/>
-                <a:cs typeface="Arial"/>
-                <a:sym typeface="Arial"/>
-              </a:endParaRPr>
-            </a:p>
-          </p:txBody>
-        </p:sp>
-        <p:pic>
-          <p:nvPicPr>
-            <p:cNvPr id="199" name="Google Shape;199;p7" descr="preencoded.png"/>
-            <p:cNvPicPr preferRelativeResize="0"/>
-            <p:nvPr/>
-          </p:nvPicPr>
-          <p:blipFill rotWithShape="1">
-            <a:blip r:embed="rId4">
-              <a:alphaModFix/>
-            </a:blip>
-            <a:srcRect/>
-            <a:stretch/>
-          </p:blipFill>
-          <p:spPr>
-            <a:xfrm>
-              <a:off x="3430923" y="1625227"/>
-              <a:ext cx="301752" cy="301752"/>
-            </a:xfrm>
-            <a:prstGeom prst="rect">
-              <a:avLst/>
-            </a:prstGeom>
-            <a:noFill/>
-            <a:ln>
-              <a:noFill/>
-            </a:ln>
-          </p:spPr>
-        </p:pic>
-        <p:sp>
-          <p:nvSpPr>
-            <p:cNvPr id="200" name="Google Shape;200;p7"/>
-            <p:cNvSpPr/>
-            <p:nvPr/>
-          </p:nvSpPr>
-          <p:spPr>
-            <a:xfrm>
-              <a:off x="3993279" y="1561219"/>
-              <a:ext cx="2203704" cy="365760"/>
-            </a:xfrm>
-            <a:prstGeom prst="rect">
-              <a:avLst/>
-            </a:prstGeom>
-            <a:noFill/>
-            <a:ln>
-              <a:noFill/>
-            </a:ln>
-          </p:spPr>
-          <p:txBody>
-            <a:bodyPr spcFirstLastPara="1" wrap="square" lIns="0" tIns="0" rIns="0" bIns="0" anchor="ctr" anchorCtr="0">
-              <a:noAutofit/>
-            </a:bodyPr>
-            <a:lstStyle/>
-            <a:p>
-              <a:pPr marL="0" marR="0" lvl="0" indent="0" algn="l" rtl="0">
-                <a:spcBef>
-                  <a:spcPts val="0"/>
-                </a:spcBef>
-                <a:spcAft>
-                  <a:spcPts val="0"/>
-                </a:spcAft>
-                <a:buClr>
-                  <a:srgbClr val="FFFFFF"/>
-                </a:buClr>
-                <a:buSzPts val="1600"/>
-                <a:buFont typeface="Arial"/>
-                <a:buNone/>
-              </a:pPr>
-              <a:r>
-                <a:rPr lang="en-IN" sz="1600" b="1">
-                  <a:solidFill>
-                    <a:srgbClr val="FFFFFF"/>
-                  </a:solidFill>
-                  <a:latin typeface="Arial"/>
-                  <a:ea typeface="Arial"/>
-                  <a:cs typeface="Arial"/>
-                  <a:sym typeface="Arial"/>
-                </a:rPr>
-                <a:t>Decongested OPDs</a:t>
-              </a:r>
-              <a:endParaRPr sz="1600">
-                <a:solidFill>
-                  <a:schemeClr val="dk1"/>
-                </a:solidFill>
-                <a:latin typeface="Arial"/>
-                <a:ea typeface="Arial"/>
-                <a:cs typeface="Arial"/>
-                <a:sym typeface="Arial"/>
-              </a:endParaRPr>
-            </a:p>
-          </p:txBody>
-        </p:sp>
-        <p:sp>
-          <p:nvSpPr>
-            <p:cNvPr id="201" name="Google Shape;201;p7"/>
-            <p:cNvSpPr/>
-            <p:nvPr/>
-          </p:nvSpPr>
-          <p:spPr>
-            <a:xfrm>
-              <a:off x="3609469" y="2238383"/>
-              <a:ext cx="2203704" cy="685800"/>
-            </a:xfrm>
-            <a:prstGeom prst="rect">
-              <a:avLst/>
-            </a:prstGeom>
-            <a:noFill/>
-            <a:ln>
-              <a:noFill/>
-            </a:ln>
-          </p:spPr>
-          <p:txBody>
-            <a:bodyPr spcFirstLastPara="1" wrap="square" lIns="0" tIns="0" rIns="0" bIns="0" anchor="ctr" anchorCtr="0">
-              <a:noAutofit/>
-            </a:bodyPr>
-            <a:lstStyle/>
-            <a:p>
-              <a:pPr marL="0" marR="0" lvl="0" indent="0" algn="l" rtl="0">
-                <a:lnSpc>
-                  <a:spcPct val="150000"/>
-                </a:lnSpc>
-                <a:spcBef>
-                  <a:spcPts val="0"/>
-                </a:spcBef>
-                <a:spcAft>
-                  <a:spcPts val="0"/>
-                </a:spcAft>
-                <a:buClr>
-                  <a:srgbClr val="E3F5F2"/>
-                </a:buClr>
-                <a:buSzPts val="1600"/>
-                <a:buFont typeface="Arial"/>
-                <a:buNone/>
-              </a:pPr>
-              <a:r>
-                <a:rPr lang="en-IN" sz="1600">
-                  <a:solidFill>
-                    <a:srgbClr val="E3F5F2"/>
-                  </a:solidFill>
-                  <a:latin typeface="Arial"/>
-                  <a:ea typeface="Arial"/>
-                  <a:cs typeface="Arial"/>
-                  <a:sym typeface="Arial"/>
-                </a:rPr>
-                <a:t>Minor cases handled at the kiosk, so hospitals see fewer crowds.</a:t>
-              </a:r>
-              <a:endParaRPr sz="1600">
-                <a:solidFill>
-                  <a:schemeClr val="dk1"/>
-                </a:solidFill>
-                <a:latin typeface="Arial"/>
-                <a:ea typeface="Arial"/>
-                <a:cs typeface="Arial"/>
-                <a:sym typeface="Arial"/>
-              </a:endParaRPr>
-            </a:p>
-          </p:txBody>
-        </p:sp>
-        <p:sp>
-          <p:nvSpPr>
-            <p:cNvPr id="202" name="Google Shape;202;p7"/>
-            <p:cNvSpPr/>
-            <p:nvPr/>
-          </p:nvSpPr>
-          <p:spPr>
-            <a:xfrm>
-              <a:off x="6247275" y="1323475"/>
-              <a:ext cx="2880000" cy="1965960"/>
-            </a:xfrm>
-            <a:prstGeom prst="roundRect">
-              <a:avLst>
-                <a:gd name="adj" fmla="val 4651"/>
-              </a:avLst>
-            </a:prstGeom>
-            <a:solidFill>
-              <a:srgbClr val="028090"/>
-            </a:solidFill>
-            <a:ln>
-              <a:noFill/>
-            </a:ln>
-          </p:spPr>
-          <p:txBody>
-            <a:bodyPr spcFirstLastPara="1" wrap="square" lIns="91425" tIns="45700" rIns="91425" bIns="45700" anchor="t" anchorCtr="0">
-              <a:noAutofit/>
-            </a:bodyPr>
-            <a:lstStyle/>
-            <a:p>
-              <a:pPr marL="0" marR="0" lvl="0" indent="0" algn="l" rtl="0">
-                <a:spcBef>
-                  <a:spcPts val="0"/>
-                </a:spcBef>
-                <a:spcAft>
-                  <a:spcPts val="0"/>
-                </a:spcAft>
-                <a:buNone/>
-              </a:pPr>
-              <a:endParaRPr sz="1800">
-                <a:solidFill>
-                  <a:schemeClr val="dk1"/>
-                </a:solidFill>
-                <a:latin typeface="Arial"/>
-                <a:ea typeface="Arial"/>
-                <a:cs typeface="Arial"/>
-                <a:sym typeface="Arial"/>
-              </a:endParaRPr>
-            </a:p>
-          </p:txBody>
-        </p:sp>
-        <p:sp>
-          <p:nvSpPr>
-            <p:cNvPr id="203" name="Google Shape;203;p7"/>
-            <p:cNvSpPr/>
-            <p:nvPr/>
-          </p:nvSpPr>
-          <p:spPr>
-            <a:xfrm>
-              <a:off x="6339194" y="1524643"/>
-              <a:ext cx="502920" cy="502920"/>
-            </a:xfrm>
-            <a:prstGeom prst="ellipse">
-              <a:avLst/>
-            </a:prstGeom>
-            <a:solidFill>
-              <a:srgbClr val="02C39A"/>
-            </a:solidFill>
-            <a:ln>
-              <a:noFill/>
-            </a:ln>
-          </p:spPr>
-          <p:txBody>
-            <a:bodyPr spcFirstLastPara="1" wrap="square" lIns="91425" tIns="45700" rIns="91425" bIns="45700" anchor="t" anchorCtr="0">
-              <a:noAutofit/>
-            </a:bodyPr>
-            <a:lstStyle/>
-            <a:p>
-              <a:pPr marL="0" marR="0" lvl="0" indent="0" algn="l" rtl="0">
-                <a:spcBef>
-                  <a:spcPts val="0"/>
-                </a:spcBef>
-                <a:spcAft>
-                  <a:spcPts val="0"/>
-                </a:spcAft>
-                <a:buNone/>
-              </a:pPr>
-              <a:endParaRPr sz="1800">
-                <a:solidFill>
-                  <a:schemeClr val="dk1"/>
-                </a:solidFill>
-                <a:latin typeface="Arial"/>
-                <a:ea typeface="Arial"/>
-                <a:cs typeface="Arial"/>
-                <a:sym typeface="Arial"/>
-              </a:endParaRPr>
-            </a:p>
-          </p:txBody>
-        </p:sp>
-        <p:pic>
-          <p:nvPicPr>
-            <p:cNvPr id="204" name="Google Shape;204;p7" descr="preencoded.png"/>
-            <p:cNvPicPr preferRelativeResize="0"/>
-            <p:nvPr/>
-          </p:nvPicPr>
-          <p:blipFill rotWithShape="1">
-            <a:blip r:embed="rId5">
-              <a:alphaModFix/>
-            </a:blip>
-            <a:srcRect/>
-            <a:stretch/>
-          </p:blipFill>
-          <p:spPr>
-            <a:xfrm>
-              <a:off x="6433094" y="1625227"/>
-              <a:ext cx="301752" cy="301752"/>
-            </a:xfrm>
-            <a:prstGeom prst="rect">
-              <a:avLst/>
-            </a:prstGeom>
-            <a:noFill/>
-            <a:ln>
-              <a:noFill/>
-            </a:ln>
-          </p:spPr>
-        </p:pic>
-        <p:sp>
-          <p:nvSpPr>
-            <p:cNvPr id="205" name="Google Shape;205;p7"/>
-            <p:cNvSpPr/>
-            <p:nvPr/>
-          </p:nvSpPr>
-          <p:spPr>
-            <a:xfrm>
-              <a:off x="7031010" y="1547503"/>
-              <a:ext cx="2203704" cy="365760"/>
-            </a:xfrm>
-            <a:prstGeom prst="rect">
-              <a:avLst/>
-            </a:prstGeom>
-            <a:noFill/>
-            <a:ln>
-              <a:noFill/>
-            </a:ln>
-          </p:spPr>
-          <p:txBody>
-            <a:bodyPr spcFirstLastPara="1" wrap="square" lIns="0" tIns="0" rIns="0" bIns="0" anchor="ctr" anchorCtr="0">
-              <a:noAutofit/>
-            </a:bodyPr>
-            <a:lstStyle/>
-            <a:p>
-              <a:pPr marL="0" marR="0" lvl="0" indent="0" algn="l" rtl="0">
-                <a:spcBef>
-                  <a:spcPts val="0"/>
-                </a:spcBef>
-                <a:spcAft>
-                  <a:spcPts val="0"/>
-                </a:spcAft>
-                <a:buClr>
-                  <a:srgbClr val="FFFFFF"/>
-                </a:buClr>
-                <a:buSzPts val="1600"/>
-                <a:buFont typeface="Arial"/>
-                <a:buNone/>
-              </a:pPr>
-              <a:r>
-                <a:rPr lang="en-IN" sz="1600" b="1">
-                  <a:solidFill>
-                    <a:srgbClr val="FFFFFF"/>
-                  </a:solidFill>
-                  <a:latin typeface="Arial"/>
-                  <a:ea typeface="Arial"/>
-                  <a:cs typeface="Arial"/>
-                  <a:sym typeface="Arial"/>
-                </a:rPr>
-                <a:t>Specialists freed up</a:t>
-              </a:r>
-              <a:endParaRPr sz="1600">
-                <a:solidFill>
-                  <a:schemeClr val="dk1"/>
-                </a:solidFill>
-                <a:latin typeface="Arial"/>
-                <a:ea typeface="Arial"/>
-                <a:cs typeface="Arial"/>
-                <a:sym typeface="Arial"/>
-              </a:endParaRPr>
-            </a:p>
-          </p:txBody>
-        </p:sp>
-        <p:sp>
-          <p:nvSpPr>
-            <p:cNvPr id="206" name="Google Shape;206;p7"/>
-            <p:cNvSpPr/>
-            <p:nvPr/>
-          </p:nvSpPr>
-          <p:spPr>
-            <a:xfrm>
-              <a:off x="6647200" y="2238383"/>
-              <a:ext cx="2203704" cy="685800"/>
-            </a:xfrm>
-            <a:prstGeom prst="rect">
-              <a:avLst/>
-            </a:prstGeom>
-            <a:noFill/>
-            <a:ln>
-              <a:noFill/>
-            </a:ln>
-          </p:spPr>
-          <p:txBody>
-            <a:bodyPr spcFirstLastPara="1" wrap="square" lIns="0" tIns="0" rIns="0" bIns="0" anchor="ctr" anchorCtr="0">
-              <a:noAutofit/>
-            </a:bodyPr>
-            <a:lstStyle/>
-            <a:p>
-              <a:pPr marL="0" marR="0" lvl="0" indent="0" algn="l" rtl="0">
-                <a:lnSpc>
-                  <a:spcPct val="150000"/>
-                </a:lnSpc>
-                <a:spcBef>
-                  <a:spcPts val="0"/>
-                </a:spcBef>
-                <a:spcAft>
-                  <a:spcPts val="0"/>
-                </a:spcAft>
-                <a:buClr>
-                  <a:srgbClr val="E3F5F2"/>
-                </a:buClr>
-                <a:buSzPts val="1600"/>
-                <a:buFont typeface="Arial"/>
-                <a:buNone/>
-              </a:pPr>
-              <a:r>
-                <a:rPr lang="en-IN" sz="1600">
-                  <a:solidFill>
-                    <a:srgbClr val="E3F5F2"/>
-                  </a:solidFill>
-                  <a:latin typeface="Arial"/>
-                  <a:ea typeface="Arial"/>
-                  <a:cs typeface="Arial"/>
-                  <a:sym typeface="Arial"/>
-                </a:rPr>
-                <a:t>Doctors spend time on serious cases instead of routine ones.</a:t>
-              </a:r>
-              <a:endParaRPr sz="1600">
-                <a:solidFill>
-                  <a:schemeClr val="dk1"/>
-                </a:solidFill>
-                <a:latin typeface="Arial"/>
-                <a:ea typeface="Arial"/>
-                <a:cs typeface="Arial"/>
-                <a:sym typeface="Arial"/>
-              </a:endParaRPr>
-            </a:p>
-          </p:txBody>
-        </p:sp>
-        <p:sp>
-          <p:nvSpPr>
-            <p:cNvPr id="207" name="Google Shape;207;p7"/>
-            <p:cNvSpPr/>
-            <p:nvPr/>
-          </p:nvSpPr>
-          <p:spPr>
-            <a:xfrm>
-              <a:off x="9188754" y="1323475"/>
-              <a:ext cx="2880000" cy="1965960"/>
-            </a:xfrm>
-            <a:prstGeom prst="roundRect">
-              <a:avLst>
-                <a:gd name="adj" fmla="val 4651"/>
-              </a:avLst>
-            </a:prstGeom>
-            <a:solidFill>
-              <a:srgbClr val="028090"/>
-            </a:solidFill>
-            <a:ln>
-              <a:noFill/>
-            </a:ln>
-          </p:spPr>
-          <p:txBody>
-            <a:bodyPr spcFirstLastPara="1" wrap="square" lIns="91425" tIns="45700" rIns="91425" bIns="45700" anchor="t" anchorCtr="0">
-              <a:noAutofit/>
-            </a:bodyPr>
-            <a:lstStyle/>
-            <a:p>
-              <a:pPr marL="0" marR="0" lvl="0" indent="0" algn="l" rtl="0">
-                <a:spcBef>
-                  <a:spcPts val="0"/>
-                </a:spcBef>
-                <a:spcAft>
-                  <a:spcPts val="0"/>
-                </a:spcAft>
-                <a:buNone/>
-              </a:pPr>
-              <a:endParaRPr sz="1800">
-                <a:solidFill>
-                  <a:schemeClr val="dk1"/>
-                </a:solidFill>
-                <a:latin typeface="Arial"/>
-                <a:ea typeface="Arial"/>
-                <a:cs typeface="Arial"/>
-                <a:sym typeface="Arial"/>
-              </a:endParaRPr>
-            </a:p>
-          </p:txBody>
-        </p:sp>
-        <p:sp>
-          <p:nvSpPr>
-            <p:cNvPr id="208" name="Google Shape;208;p7"/>
-            <p:cNvSpPr/>
-            <p:nvPr/>
-          </p:nvSpPr>
-          <p:spPr>
-            <a:xfrm>
-              <a:off x="9246986" y="1524643"/>
-              <a:ext cx="502920" cy="502920"/>
-            </a:xfrm>
-            <a:prstGeom prst="ellipse">
-              <a:avLst/>
-            </a:prstGeom>
-            <a:solidFill>
-              <a:srgbClr val="02C39A"/>
-            </a:solidFill>
-            <a:ln>
-              <a:noFill/>
-            </a:ln>
-          </p:spPr>
-          <p:txBody>
-            <a:bodyPr spcFirstLastPara="1" wrap="square" lIns="91425" tIns="45700" rIns="91425" bIns="45700" anchor="t" anchorCtr="0">
-              <a:noAutofit/>
-            </a:bodyPr>
-            <a:lstStyle/>
-            <a:p>
-              <a:pPr marL="0" marR="0" lvl="0" indent="0" algn="l" rtl="0">
-                <a:spcBef>
-                  <a:spcPts val="0"/>
-                </a:spcBef>
-                <a:spcAft>
-                  <a:spcPts val="0"/>
-                </a:spcAft>
-                <a:buNone/>
-              </a:pPr>
-              <a:endParaRPr sz="1800">
-                <a:solidFill>
-                  <a:schemeClr val="dk1"/>
-                </a:solidFill>
-                <a:latin typeface="Arial"/>
-                <a:ea typeface="Arial"/>
-                <a:cs typeface="Arial"/>
-                <a:sym typeface="Arial"/>
-              </a:endParaRPr>
-            </a:p>
-          </p:txBody>
-        </p:sp>
-        <p:pic>
-          <p:nvPicPr>
-            <p:cNvPr id="209" name="Google Shape;209;p7" descr="preencoded.png"/>
-            <p:cNvPicPr preferRelativeResize="0"/>
-            <p:nvPr/>
-          </p:nvPicPr>
-          <p:blipFill rotWithShape="1">
-            <a:blip r:embed="rId6">
-              <a:alphaModFix/>
-            </a:blip>
-            <a:srcRect/>
-            <a:stretch/>
-          </p:blipFill>
-          <p:spPr>
-            <a:xfrm>
-              <a:off x="9335806" y="1625227"/>
-              <a:ext cx="301752" cy="301752"/>
-            </a:xfrm>
-            <a:prstGeom prst="rect">
-              <a:avLst/>
-            </a:prstGeom>
-            <a:noFill/>
-            <a:ln>
-              <a:noFill/>
-            </a:ln>
-          </p:spPr>
-        </p:pic>
-        <p:sp>
-          <p:nvSpPr>
-            <p:cNvPr id="210" name="Google Shape;210;p7"/>
-            <p:cNvSpPr/>
-            <p:nvPr/>
-          </p:nvSpPr>
-          <p:spPr>
-            <a:xfrm>
-              <a:off x="9806214" y="1547503"/>
-              <a:ext cx="2203704" cy="365760"/>
-            </a:xfrm>
-            <a:prstGeom prst="rect">
-              <a:avLst/>
-            </a:prstGeom>
-            <a:noFill/>
-            <a:ln>
-              <a:noFill/>
-            </a:ln>
-          </p:spPr>
-          <p:txBody>
-            <a:bodyPr spcFirstLastPara="1" wrap="square" lIns="0" tIns="0" rIns="0" bIns="0" anchor="ctr" anchorCtr="0">
-              <a:noAutofit/>
-            </a:bodyPr>
-            <a:lstStyle/>
-            <a:p>
-              <a:pPr marL="0" marR="0" lvl="0" indent="0" algn="l" rtl="0">
-                <a:spcBef>
-                  <a:spcPts val="0"/>
-                </a:spcBef>
-                <a:spcAft>
-                  <a:spcPts val="0"/>
-                </a:spcAft>
-                <a:buClr>
-                  <a:srgbClr val="FFFFFF"/>
-                </a:buClr>
-                <a:buSzPts val="1600"/>
-                <a:buFont typeface="Arial"/>
-                <a:buNone/>
-              </a:pPr>
-              <a:r>
-                <a:rPr lang="en-IN" sz="1600" b="1">
-                  <a:solidFill>
-                    <a:srgbClr val="FFFFFF"/>
-                  </a:solidFill>
-                  <a:latin typeface="Arial"/>
-                  <a:ea typeface="Arial"/>
-                  <a:cs typeface="Arial"/>
-                  <a:sym typeface="Arial"/>
-                </a:rPr>
-                <a:t>Less waiting &amp; travel</a:t>
-              </a:r>
-              <a:endParaRPr sz="1600">
-                <a:solidFill>
-                  <a:schemeClr val="dk1"/>
-                </a:solidFill>
-                <a:latin typeface="Arial"/>
-                <a:ea typeface="Arial"/>
-                <a:cs typeface="Arial"/>
-                <a:sym typeface="Arial"/>
-              </a:endParaRPr>
-            </a:p>
-          </p:txBody>
-        </p:sp>
-        <p:sp>
-          <p:nvSpPr>
-            <p:cNvPr id="211" name="Google Shape;211;p7"/>
-            <p:cNvSpPr/>
-            <p:nvPr/>
-          </p:nvSpPr>
-          <p:spPr>
-            <a:xfrm>
-              <a:off x="9463552" y="2238383"/>
-              <a:ext cx="2203704" cy="685800"/>
-            </a:xfrm>
-            <a:prstGeom prst="rect">
-              <a:avLst/>
-            </a:prstGeom>
-            <a:noFill/>
-            <a:ln>
-              <a:noFill/>
-            </a:ln>
-          </p:spPr>
-          <p:txBody>
-            <a:bodyPr spcFirstLastPara="1" wrap="square" lIns="0" tIns="0" rIns="0" bIns="0" anchor="ctr" anchorCtr="0">
-              <a:noAutofit/>
-            </a:bodyPr>
-            <a:lstStyle/>
-            <a:p>
-              <a:pPr marL="0" marR="0" lvl="0" indent="0" algn="l" rtl="0">
-                <a:lnSpc>
-                  <a:spcPct val="150000"/>
-                </a:lnSpc>
-                <a:spcBef>
-                  <a:spcPts val="0"/>
-                </a:spcBef>
-                <a:spcAft>
-                  <a:spcPts val="0"/>
-                </a:spcAft>
-                <a:buClr>
-                  <a:srgbClr val="E3F5F2"/>
-                </a:buClr>
-                <a:buSzPts val="1600"/>
-                <a:buFont typeface="Arial"/>
-                <a:buNone/>
-              </a:pPr>
-              <a:r>
-                <a:rPr lang="en-IN" sz="1600">
-                  <a:solidFill>
-                    <a:srgbClr val="E3F5F2"/>
-                  </a:solidFill>
-                  <a:latin typeface="Arial"/>
-                  <a:ea typeface="Arial"/>
-                  <a:cs typeface="Arial"/>
-                  <a:sym typeface="Arial"/>
-                </a:rPr>
-                <a:t>No lost wages or long queues for a simple consultation.</a:t>
-              </a:r>
-              <a:endParaRPr sz="1600">
-                <a:solidFill>
-                  <a:schemeClr val="dk1"/>
-                </a:solidFill>
-                <a:latin typeface="Arial"/>
-                <a:ea typeface="Arial"/>
-                <a:cs typeface="Arial"/>
-                <a:sym typeface="Arial"/>
-              </a:endParaRPr>
-            </a:p>
-          </p:txBody>
-        </p:sp>
-      </p:grpSp>
-      <p:sp>
-        <p:nvSpPr>
-          <p:cNvPr id="212" name="Google Shape;212;p7"/>
-          <p:cNvSpPr/>
-          <p:nvPr/>
-        </p:nvSpPr>
-        <p:spPr>
-          <a:xfrm>
-            <a:off x="386119" y="3538487"/>
-            <a:ext cx="5486400" cy="365760"/>
-          </a:xfrm>
-          <a:prstGeom prst="rect">
-            <a:avLst/>
-          </a:prstGeom>
-          <a:noFill/>
-          <a:ln>
-            <a:noFill/>
-          </a:ln>
-        </p:spPr>
-        <p:txBody>
-          <a:bodyPr spcFirstLastPara="1" wrap="square" lIns="0" tIns="0" rIns="0" bIns="0" anchor="ctr" anchorCtr="0">
-            <a:noAutofit/>
-          </a:bodyPr>
-          <a:lstStyle/>
-          <a:p>
-            <a:pPr marL="0" marR="0" lvl="0" indent="0" algn="l" rtl="0">
-              <a:spcBef>
-                <a:spcPts val="0"/>
-              </a:spcBef>
-              <a:spcAft>
-                <a:spcPts val="0"/>
-              </a:spcAft>
-              <a:buClr>
-                <a:srgbClr val="02C39A"/>
-              </a:buClr>
-              <a:buSzPts val="2400"/>
-              <a:buFont typeface="Arial"/>
-              <a:buNone/>
-            </a:pPr>
-            <a:r>
-              <a:rPr lang="en-IN" sz="2400" b="1">
-                <a:solidFill>
-                  <a:srgbClr val="02C39A"/>
-                </a:solidFill>
-                <a:latin typeface="Arial"/>
-                <a:ea typeface="Arial"/>
-                <a:cs typeface="Arial"/>
-                <a:sym typeface="Arial"/>
-              </a:rPr>
-              <a:t>Future scope</a:t>
-            </a:r>
-            <a:endParaRPr sz="2400">
-              <a:solidFill>
-                <a:schemeClr val="dk1"/>
-              </a:solidFill>
-              <a:latin typeface="Arial"/>
-              <a:ea typeface="Arial"/>
-              <a:cs typeface="Arial"/>
-              <a:sym typeface="Arial"/>
-            </a:endParaRPr>
-          </a:p>
-        </p:txBody>
-      </p:sp>
-      <p:sp>
-        <p:nvSpPr>
-          <p:cNvPr id="213" name="Google Shape;213;p7"/>
-          <p:cNvSpPr/>
-          <p:nvPr/>
-        </p:nvSpPr>
-        <p:spPr>
-          <a:xfrm>
-            <a:off x="297425" y="4044050"/>
-            <a:ext cx="9018300" cy="2814000"/>
-          </a:xfrm>
-          <a:prstGeom prst="rect">
-            <a:avLst/>
-          </a:prstGeom>
-          <a:noFill/>
-          <a:ln>
-            <a:noFill/>
-          </a:ln>
-        </p:spPr>
-        <p:txBody>
-          <a:bodyPr spcFirstLastPara="1" wrap="square" lIns="0" tIns="0" rIns="0" bIns="0" anchor="ctr" anchorCtr="0">
-            <a:noAutofit/>
-          </a:bodyPr>
-          <a:lstStyle/>
-          <a:p>
-            <a:pPr marL="177800" marR="0" lvl="0" indent="-152400" algn="l" rtl="0">
-              <a:lnSpc>
-                <a:spcPct val="150000"/>
-              </a:lnSpc>
-              <a:spcBef>
-                <a:spcPts val="0"/>
-              </a:spcBef>
-              <a:spcAft>
-                <a:spcPts val="0"/>
-              </a:spcAft>
-              <a:buClr>
-                <a:schemeClr val="dk1"/>
-              </a:buClr>
-              <a:buSzPts val="1400"/>
-              <a:buFont typeface="Arial"/>
-              <a:buChar char="•"/>
-            </a:pPr>
-            <a:r>
-              <a:rPr lang="en-IN" dirty="0">
-                <a:solidFill>
-                  <a:schemeClr val="dk1"/>
-                </a:solidFill>
-                <a:latin typeface="Arial"/>
-                <a:ea typeface="Arial"/>
-                <a:cs typeface="Arial"/>
-                <a:sym typeface="Arial"/>
-              </a:rPr>
-              <a:t>Add more tests: blood sugar strips, ECG patch, basic eye &amp; hearing screening.</a:t>
-            </a:r>
-            <a:endParaRPr dirty="0">
-              <a:solidFill>
-                <a:schemeClr val="dk1"/>
-              </a:solidFill>
-              <a:latin typeface="Arial"/>
-              <a:ea typeface="Arial"/>
-              <a:cs typeface="Arial"/>
-              <a:sym typeface="Arial"/>
-            </a:endParaRPr>
-          </a:p>
-          <a:p>
-            <a:pPr marL="177800" marR="0" lvl="0" indent="-152400" algn="l" rtl="0">
-              <a:lnSpc>
-                <a:spcPct val="150000"/>
-              </a:lnSpc>
-              <a:spcBef>
-                <a:spcPts val="800"/>
-              </a:spcBef>
-              <a:spcAft>
-                <a:spcPts val="0"/>
-              </a:spcAft>
-              <a:buClr>
-                <a:schemeClr val="dk1"/>
-              </a:buClr>
-              <a:buSzPts val="1400"/>
-              <a:buFont typeface="Arial"/>
-              <a:buChar char="•"/>
-            </a:pPr>
-            <a:r>
-              <a:rPr lang="en-IN" dirty="0">
-                <a:solidFill>
-                  <a:schemeClr val="dk1"/>
-                </a:solidFill>
-                <a:latin typeface="Arial"/>
-                <a:ea typeface="Arial"/>
-                <a:cs typeface="Arial"/>
-                <a:sym typeface="Arial"/>
-              </a:rPr>
-              <a:t>Link every report to the patient's ABHA digital health record for lifelong history.</a:t>
-            </a:r>
-            <a:endParaRPr dirty="0">
-              <a:solidFill>
-                <a:schemeClr val="dk1"/>
-              </a:solidFill>
-              <a:latin typeface="Arial"/>
-              <a:ea typeface="Arial"/>
-              <a:cs typeface="Arial"/>
-              <a:sym typeface="Arial"/>
-            </a:endParaRPr>
-          </a:p>
-          <a:p>
-            <a:pPr marL="177800" marR="0" lvl="0" indent="-152400" algn="l" rtl="0">
-              <a:lnSpc>
-                <a:spcPct val="150000"/>
-              </a:lnSpc>
-              <a:spcBef>
-                <a:spcPts val="800"/>
-              </a:spcBef>
-              <a:spcAft>
-                <a:spcPts val="0"/>
-              </a:spcAft>
-              <a:buClr>
-                <a:schemeClr val="dk1"/>
-              </a:buClr>
-              <a:buSzPts val="1400"/>
-              <a:buFont typeface="Arial"/>
-              <a:buChar char="•"/>
-            </a:pPr>
-            <a:r>
-              <a:rPr lang="en-IN" dirty="0">
-                <a:solidFill>
-                  <a:schemeClr val="dk1"/>
-                </a:solidFill>
-                <a:latin typeface="Arial"/>
-                <a:ea typeface="Arial"/>
-                <a:cs typeface="Arial"/>
-                <a:sym typeface="Arial"/>
-              </a:rPr>
-              <a:t>Use anonymised village data to alert officials about disease outbreaks early.</a:t>
-            </a:r>
-            <a:endParaRPr dirty="0">
-              <a:solidFill>
-                <a:schemeClr val="dk1"/>
-              </a:solidFill>
-              <a:latin typeface="Arial"/>
-              <a:ea typeface="Arial"/>
-              <a:cs typeface="Arial"/>
-              <a:sym typeface="Arial"/>
-            </a:endParaRPr>
-          </a:p>
-          <a:p>
-            <a:pPr marL="177800" marR="0" lvl="0" indent="-152400" algn="l" rtl="0">
-              <a:lnSpc>
-                <a:spcPct val="150000"/>
-              </a:lnSpc>
-              <a:spcBef>
-                <a:spcPts val="800"/>
-              </a:spcBef>
-              <a:spcAft>
-                <a:spcPts val="0"/>
-              </a:spcAft>
-              <a:buClr>
-                <a:schemeClr val="dk1"/>
-              </a:buClr>
-              <a:buSzPts val="1400"/>
-              <a:buFont typeface="Arial"/>
-              <a:buChar char="•"/>
-            </a:pPr>
-            <a:r>
-              <a:rPr lang="en-IN" dirty="0">
-                <a:solidFill>
-                  <a:schemeClr val="dk1"/>
-                </a:solidFill>
-                <a:latin typeface="Arial"/>
-                <a:ea typeface="Arial"/>
-                <a:cs typeface="Arial"/>
-                <a:sym typeface="Arial"/>
-              </a:rPr>
-              <a:t>Solar power + offline mode so kiosks work even with weak electricity or internet.</a:t>
-            </a:r>
-            <a:endParaRPr dirty="0">
-              <a:solidFill>
-                <a:schemeClr val="dk1"/>
-              </a:solidFill>
-              <a:latin typeface="Arial"/>
-              <a:ea typeface="Arial"/>
-              <a:cs typeface="Arial"/>
-              <a:sym typeface="Arial"/>
-            </a:endParaRPr>
-          </a:p>
-          <a:p>
-            <a:pPr marL="177800" marR="0" lvl="0" indent="-152400" algn="l" rtl="0">
-              <a:lnSpc>
-                <a:spcPct val="150000"/>
-              </a:lnSpc>
-              <a:spcBef>
-                <a:spcPts val="800"/>
-              </a:spcBef>
-              <a:spcAft>
-                <a:spcPts val="0"/>
-              </a:spcAft>
-              <a:buClr>
-                <a:schemeClr val="dk1"/>
-              </a:buClr>
-              <a:buSzPts val="1400"/>
-              <a:buFont typeface="Arial"/>
-              <a:buChar char="•"/>
-            </a:pPr>
-            <a:r>
-              <a:rPr lang="en-IN" dirty="0">
-                <a:solidFill>
-                  <a:schemeClr val="dk1"/>
-                </a:solidFill>
-                <a:latin typeface="Arial"/>
-                <a:ea typeface="Arial"/>
-                <a:cs typeface="Arial"/>
-                <a:sym typeface="Arial"/>
-              </a:rPr>
-              <a:t>Scale from one village to a district-wide network run with local health workers (ASHAs)</a:t>
-            </a:r>
-            <a:endParaRPr dirty="0">
-              <a:solidFill>
-                <a:schemeClr val="dk1"/>
-              </a:solidFill>
-              <a:latin typeface="Arial"/>
-              <a:ea typeface="Arial"/>
-              <a:cs typeface="Arial"/>
-              <a:sym typeface="Arial"/>
-            </a:endParaRPr>
-          </a:p>
-          <a:p>
-            <a:pPr marL="177800" marR="0" lvl="0" indent="-152400" algn="l" rtl="0">
-              <a:lnSpc>
-                <a:spcPct val="150000"/>
-              </a:lnSpc>
-              <a:spcBef>
-                <a:spcPts val="800"/>
-              </a:spcBef>
-              <a:spcAft>
-                <a:spcPts val="0"/>
-              </a:spcAft>
-              <a:buClr>
-                <a:schemeClr val="dk1"/>
-              </a:buClr>
-              <a:buSzPts val="1400"/>
-              <a:buChar char="•"/>
-            </a:pPr>
-            <a:r>
-              <a:rPr lang="en-IN" dirty="0">
-                <a:solidFill>
-                  <a:schemeClr val="dk1"/>
-                </a:solidFill>
-              </a:rPr>
-              <a:t>External link:</a:t>
-            </a:r>
-            <a:endParaRPr dirty="0">
-              <a:solidFill>
-                <a:schemeClr val="dk1"/>
-              </a:solidFill>
-            </a:endParaRPr>
-          </a:p>
-          <a:p>
-            <a:pPr marL="457200" lvl="0" indent="-317500" algn="l" rtl="0">
-              <a:lnSpc>
-                <a:spcPct val="115000"/>
-              </a:lnSpc>
-              <a:spcBef>
-                <a:spcPts val="0"/>
-              </a:spcBef>
-              <a:spcAft>
-                <a:spcPts val="0"/>
-              </a:spcAft>
-              <a:buClr>
-                <a:schemeClr val="dk1"/>
-              </a:buClr>
-              <a:buSzPts val="1400"/>
-              <a:buChar char="•"/>
-            </a:pPr>
-            <a:r>
-              <a:rPr lang="en-IN" u="sng" dirty="0">
-                <a:solidFill>
-                  <a:srgbClr val="0000FF"/>
-                </a:solidFill>
-                <a:hlinkClick r:id="rId7">
-                  <a:extLst>
-                    <a:ext uri="{A12FA001-AC4F-418D-AE19-62706E023703}">
-                      <ahyp:hlinkClr xmlns:ahyp="http://schemas.microsoft.com/office/drawing/2018/hyperlinkcolor" val="tx"/>
-                    </a:ext>
-                  </a:extLst>
-                </a:hlinkClick>
-              </a:rPr>
-              <a:t>https://docs.google.com/document/d/1ZCZfzZupEzLPW2j9h5pHD_JS4Qk-SkGE9nn89oN3pU8/edit?tab=t.0</a:t>
-            </a:r>
-            <a:endParaRPr dirty="0">
-              <a:solidFill>
-                <a:schemeClr val="dk1"/>
-              </a:solidFill>
-            </a:endParaRPr>
-          </a:p>
-        </p:txBody>
-      </p:sp>
-      <p:grpSp>
-        <p:nvGrpSpPr>
-          <p:cNvPr id="214" name="Google Shape;214;p7"/>
-          <p:cNvGrpSpPr/>
-          <p:nvPr/>
-        </p:nvGrpSpPr>
-        <p:grpSpPr>
-          <a:xfrm>
-            <a:off x="9188754" y="3493120"/>
-            <a:ext cx="2898164" cy="1965960"/>
-            <a:chOff x="9188754" y="3493120"/>
-            <a:chExt cx="2898164" cy="1965960"/>
-          </a:xfrm>
-        </p:grpSpPr>
-        <p:sp>
-          <p:nvSpPr>
-            <p:cNvPr id="215" name="Google Shape;215;p7"/>
-            <p:cNvSpPr/>
-            <p:nvPr/>
-          </p:nvSpPr>
-          <p:spPr>
-            <a:xfrm>
-              <a:off x="9188754" y="3493120"/>
-              <a:ext cx="2880000" cy="1965960"/>
-            </a:xfrm>
-            <a:prstGeom prst="roundRect">
-              <a:avLst>
-                <a:gd name="adj" fmla="val 4651"/>
-              </a:avLst>
-            </a:prstGeom>
-            <a:solidFill>
-              <a:srgbClr val="028090"/>
-            </a:solidFill>
-            <a:ln>
-              <a:noFill/>
-            </a:ln>
-          </p:spPr>
-          <p:txBody>
-            <a:bodyPr spcFirstLastPara="1" wrap="square" lIns="91425" tIns="45700" rIns="91425" bIns="45700" anchor="t" anchorCtr="0">
-              <a:noAutofit/>
-            </a:bodyPr>
-            <a:lstStyle/>
-            <a:p>
-              <a:pPr marL="0" marR="0" lvl="0" indent="0" algn="l" rtl="0">
-                <a:spcBef>
-                  <a:spcPts val="0"/>
-                </a:spcBef>
-                <a:spcAft>
-                  <a:spcPts val="0"/>
-                </a:spcAft>
-                <a:buNone/>
-              </a:pPr>
-              <a:endParaRPr sz="1800">
-                <a:solidFill>
-                  <a:schemeClr val="dk1"/>
-                </a:solidFill>
-                <a:latin typeface="Arial"/>
-                <a:ea typeface="Arial"/>
-                <a:cs typeface="Arial"/>
-                <a:sym typeface="Arial"/>
-              </a:endParaRPr>
-            </a:p>
-          </p:txBody>
-        </p:sp>
-        <p:sp>
-          <p:nvSpPr>
-            <p:cNvPr id="216" name="Google Shape;216;p7"/>
-            <p:cNvSpPr/>
-            <p:nvPr/>
-          </p:nvSpPr>
-          <p:spPr>
-            <a:xfrm>
-              <a:off x="9266036" y="3681588"/>
-              <a:ext cx="502920" cy="502920"/>
-            </a:xfrm>
-            <a:prstGeom prst="ellipse">
-              <a:avLst/>
-            </a:prstGeom>
-            <a:solidFill>
-              <a:srgbClr val="02C39A"/>
-            </a:solidFill>
-            <a:ln>
-              <a:noFill/>
-            </a:ln>
-          </p:spPr>
-          <p:txBody>
-            <a:bodyPr spcFirstLastPara="1" wrap="square" lIns="91425" tIns="45700" rIns="91425" bIns="45700" anchor="t" anchorCtr="0">
-              <a:noAutofit/>
-            </a:bodyPr>
-            <a:lstStyle/>
-            <a:p>
-              <a:pPr marL="0" marR="0" lvl="0" indent="0" algn="l" rtl="0">
-                <a:spcBef>
-                  <a:spcPts val="0"/>
-                </a:spcBef>
-                <a:spcAft>
-                  <a:spcPts val="0"/>
-                </a:spcAft>
-                <a:buNone/>
-              </a:pPr>
-              <a:endParaRPr sz="1800">
-                <a:solidFill>
-                  <a:schemeClr val="dk1"/>
-                </a:solidFill>
-                <a:latin typeface="Arial"/>
-                <a:ea typeface="Arial"/>
-                <a:cs typeface="Arial"/>
-                <a:sym typeface="Arial"/>
-              </a:endParaRPr>
-            </a:p>
-          </p:txBody>
-        </p:sp>
-        <p:sp>
-          <p:nvSpPr>
-            <p:cNvPr id="217" name="Google Shape;217;p7"/>
-            <p:cNvSpPr/>
-            <p:nvPr/>
-          </p:nvSpPr>
-          <p:spPr>
-            <a:xfrm>
-              <a:off x="9883214" y="3717148"/>
-              <a:ext cx="2203704" cy="365760"/>
-            </a:xfrm>
-            <a:prstGeom prst="rect">
-              <a:avLst/>
-            </a:prstGeom>
-            <a:noFill/>
-            <a:ln>
-              <a:noFill/>
-            </a:ln>
-          </p:spPr>
-          <p:txBody>
-            <a:bodyPr spcFirstLastPara="1" wrap="square" lIns="0" tIns="0" rIns="0" bIns="0" anchor="ctr" anchorCtr="0">
-              <a:noAutofit/>
-            </a:bodyPr>
-            <a:lstStyle/>
-            <a:p>
-              <a:pPr marL="0" marR="0" lvl="0" indent="0" algn="l" rtl="0">
-                <a:spcBef>
-                  <a:spcPts val="0"/>
-                </a:spcBef>
-                <a:spcAft>
-                  <a:spcPts val="0"/>
-                </a:spcAft>
-                <a:buNone/>
-              </a:pPr>
-              <a:r>
-                <a:rPr lang="en-IN" sz="1600">
-                  <a:solidFill>
-                    <a:schemeClr val="lt1"/>
-                  </a:solidFill>
-                  <a:latin typeface="Arial"/>
-                  <a:ea typeface="Arial"/>
-                  <a:cs typeface="Arial"/>
-                  <a:sym typeface="Arial"/>
-                </a:rPr>
-                <a:t>Faster referrals</a:t>
-              </a:r>
-              <a:endParaRPr sz="1600">
-                <a:solidFill>
-                  <a:schemeClr val="lt1"/>
-                </a:solidFill>
-                <a:latin typeface="Arial"/>
-                <a:ea typeface="Arial"/>
-                <a:cs typeface="Arial"/>
-                <a:sym typeface="Arial"/>
-              </a:endParaRPr>
-            </a:p>
-          </p:txBody>
-        </p:sp>
-        <p:sp>
-          <p:nvSpPr>
-            <p:cNvPr id="218" name="Google Shape;218;p7"/>
-            <p:cNvSpPr/>
-            <p:nvPr/>
-          </p:nvSpPr>
-          <p:spPr>
-            <a:xfrm>
-              <a:off x="9463552" y="4408028"/>
-              <a:ext cx="2546366" cy="685800"/>
-            </a:xfrm>
-            <a:prstGeom prst="rect">
-              <a:avLst/>
-            </a:prstGeom>
-            <a:noFill/>
-            <a:ln>
-              <a:noFill/>
-            </a:ln>
-          </p:spPr>
-          <p:txBody>
-            <a:bodyPr spcFirstLastPara="1" wrap="square" lIns="0" tIns="0" rIns="0" bIns="0" anchor="ctr" anchorCtr="0">
-              <a:noAutofit/>
-            </a:bodyPr>
-            <a:lstStyle/>
-            <a:p>
-              <a:pPr marL="0" marR="0" lvl="0" indent="0" algn="l" rtl="0">
-                <a:lnSpc>
-                  <a:spcPct val="150000"/>
-                </a:lnSpc>
-                <a:spcBef>
-                  <a:spcPts val="0"/>
-                </a:spcBef>
-                <a:spcAft>
-                  <a:spcPts val="0"/>
-                </a:spcAft>
-                <a:buNone/>
-              </a:pPr>
-              <a:r>
-                <a:rPr lang="en-IN" sz="1600">
-                  <a:solidFill>
-                    <a:schemeClr val="lt1"/>
-                  </a:solidFill>
-                  <a:latin typeface="Arial"/>
-                  <a:ea typeface="Arial"/>
-                  <a:cs typeface="Arial"/>
-                  <a:sym typeface="Arial"/>
-                </a:rPr>
-                <a:t>Patients requiring examination can be directed to appropriate facilities.</a:t>
-              </a:r>
-              <a:endParaRPr sz="1600">
-                <a:solidFill>
-                  <a:schemeClr val="lt1"/>
-                </a:solidFill>
-                <a:latin typeface="Arial"/>
-                <a:ea typeface="Arial"/>
-                <a:cs typeface="Arial"/>
-                <a:sym typeface="Arial"/>
-              </a:endParaRPr>
-            </a:p>
-          </p:txBody>
-        </p:sp>
-        <p:sp>
-          <p:nvSpPr>
-            <p:cNvPr id="219" name="Google Shape;219;p7" descr="Abacus outline"/>
-            <p:cNvSpPr/>
-            <p:nvPr/>
-          </p:nvSpPr>
-          <p:spPr>
-            <a:xfrm>
-              <a:off x="9352070" y="3771855"/>
-              <a:ext cx="315119" cy="315119"/>
-            </a:xfrm>
-            <a:prstGeom prst="rect">
-              <a:avLst/>
-            </a:prstGeom>
-            <a:noFill/>
-            <a:ln>
-              <a:noFill/>
-            </a:ln>
-          </p:spPr>
-          <p:txBody>
-            <a:bodyPr/>
-            <a:lstStyle/>
-            <a:p>
-              <a:endParaRPr lang="en-IN"/>
-            </a:p>
-          </p:txBody>
-        </p:sp>
-      </p:grpSp>
-      <p:grpSp>
-        <p:nvGrpSpPr>
-          <p:cNvPr id="220" name="Google Shape;220;p7"/>
-          <p:cNvGrpSpPr/>
-          <p:nvPr/>
-        </p:nvGrpSpPr>
-        <p:grpSpPr>
-          <a:xfrm>
-            <a:off x="9170590" y="5680941"/>
-            <a:ext cx="2880000" cy="839125"/>
-            <a:chOff x="9170590" y="5680941"/>
-            <a:chExt cx="2880000" cy="839125"/>
-          </a:xfrm>
-        </p:grpSpPr>
-        <p:sp>
-          <p:nvSpPr>
-            <p:cNvPr id="221" name="Google Shape;221;p7"/>
-            <p:cNvSpPr/>
-            <p:nvPr/>
-          </p:nvSpPr>
-          <p:spPr>
-            <a:xfrm>
-              <a:off x="9170590" y="5680941"/>
-              <a:ext cx="2880000" cy="839125"/>
-            </a:xfrm>
-            <a:prstGeom prst="roundRect">
-              <a:avLst>
-                <a:gd name="adj" fmla="val 4651"/>
-              </a:avLst>
-            </a:prstGeom>
-            <a:solidFill>
-              <a:srgbClr val="028090"/>
-            </a:solidFill>
-            <a:ln>
-              <a:noFill/>
-            </a:ln>
-          </p:spPr>
-          <p:txBody>
-            <a:bodyPr spcFirstLastPara="1" wrap="square" lIns="91425" tIns="45700" rIns="91425" bIns="45700" anchor="t" anchorCtr="0">
-              <a:noAutofit/>
-            </a:bodyPr>
-            <a:lstStyle/>
-            <a:p>
-              <a:pPr marL="0" marR="0" lvl="0" indent="0" algn="l" rtl="0">
-                <a:spcBef>
-                  <a:spcPts val="0"/>
-                </a:spcBef>
-                <a:spcAft>
-                  <a:spcPts val="0"/>
-                </a:spcAft>
-                <a:buNone/>
-              </a:pPr>
-              <a:endParaRPr sz="1800">
-                <a:solidFill>
-                  <a:schemeClr val="dk1"/>
-                </a:solidFill>
-                <a:latin typeface="Arial"/>
-                <a:ea typeface="Arial"/>
-                <a:cs typeface="Arial"/>
-                <a:sym typeface="Arial"/>
-              </a:endParaRPr>
-            </a:p>
-          </p:txBody>
-        </p:sp>
-        <p:sp>
-          <p:nvSpPr>
-            <p:cNvPr id="222" name="Google Shape;222;p7"/>
-            <p:cNvSpPr/>
-            <p:nvPr/>
-          </p:nvSpPr>
-          <p:spPr>
-            <a:xfrm>
-              <a:off x="9228533" y="5836389"/>
-              <a:ext cx="448056" cy="448056"/>
-            </a:xfrm>
-            <a:prstGeom prst="ellipse">
-              <a:avLst/>
-            </a:prstGeom>
-            <a:solidFill>
-              <a:srgbClr val="02C39A"/>
-            </a:solidFill>
-            <a:ln>
-              <a:noFill/>
-            </a:ln>
-          </p:spPr>
-          <p:txBody>
-            <a:bodyPr spcFirstLastPara="1" wrap="square" lIns="91425" tIns="45700" rIns="91425" bIns="45700" anchor="t" anchorCtr="0">
-              <a:noAutofit/>
-            </a:bodyPr>
-            <a:lstStyle/>
-            <a:p>
-              <a:pPr marL="0" marR="0" lvl="0" indent="0" algn="l" rtl="0">
-                <a:spcBef>
-                  <a:spcPts val="0"/>
-                </a:spcBef>
-                <a:spcAft>
-                  <a:spcPts val="0"/>
-                </a:spcAft>
-                <a:buNone/>
-              </a:pPr>
-              <a:endParaRPr sz="1800">
-                <a:solidFill>
-                  <a:schemeClr val="dk1"/>
-                </a:solidFill>
-                <a:latin typeface="Arial"/>
-                <a:ea typeface="Arial"/>
-                <a:cs typeface="Arial"/>
-                <a:sym typeface="Arial"/>
-              </a:endParaRPr>
-            </a:p>
-          </p:txBody>
-        </p:sp>
-        <p:sp>
-          <p:nvSpPr>
-            <p:cNvPr id="223" name="Google Shape;223;p7"/>
-            <p:cNvSpPr/>
-            <p:nvPr/>
-          </p:nvSpPr>
-          <p:spPr>
-            <a:xfrm>
-              <a:off x="9723082" y="5865707"/>
-              <a:ext cx="2326950" cy="365760"/>
-            </a:xfrm>
-            <a:prstGeom prst="rect">
-              <a:avLst/>
-            </a:prstGeom>
-            <a:noFill/>
-            <a:ln>
-              <a:noFill/>
-            </a:ln>
-          </p:spPr>
-          <p:txBody>
-            <a:bodyPr spcFirstLastPara="1" wrap="square" lIns="0" tIns="0" rIns="0" bIns="0" anchor="ctr" anchorCtr="0">
-              <a:noAutofit/>
-            </a:bodyPr>
-            <a:lstStyle/>
-            <a:p>
-              <a:pPr marL="0" marR="0" lvl="0" indent="0" algn="l" rtl="0">
-                <a:spcBef>
-                  <a:spcPts val="0"/>
-                </a:spcBef>
-                <a:spcAft>
-                  <a:spcPts val="0"/>
-                </a:spcAft>
-                <a:buNone/>
-              </a:pPr>
-              <a:r>
-                <a:rPr lang="en-IN" sz="1600">
-                  <a:solidFill>
-                    <a:schemeClr val="lt1"/>
-                  </a:solidFill>
-                  <a:latin typeface="Arial"/>
-                  <a:ea typeface="Arial"/>
-                  <a:cs typeface="Arial"/>
-                  <a:sym typeface="Arial"/>
-                </a:rPr>
-                <a:t>AI assists. Doctor decides.</a:t>
-              </a:r>
-              <a:endParaRPr sz="1600">
-                <a:solidFill>
-                  <a:schemeClr val="lt1"/>
-                </a:solidFill>
-                <a:latin typeface="Arial"/>
-                <a:ea typeface="Arial"/>
-                <a:cs typeface="Arial"/>
-                <a:sym typeface="Arial"/>
-              </a:endParaRPr>
-            </a:p>
-          </p:txBody>
-        </p:sp>
-        <p:sp>
-          <p:nvSpPr>
-            <p:cNvPr id="224" name="Google Shape;224;p7" descr="Address Book outline"/>
-            <p:cNvSpPr/>
-            <p:nvPr/>
-          </p:nvSpPr>
-          <p:spPr>
-            <a:xfrm>
-              <a:off x="9285613" y="5896534"/>
-              <a:ext cx="334933" cy="334933"/>
-            </a:xfrm>
-            <a:prstGeom prst="rect">
-              <a:avLst/>
-            </a:prstGeom>
-            <a:noFill/>
-            <a:ln>
-              <a:noFill/>
-            </a:ln>
-          </p:spPr>
-          <p:txBody>
-            <a:bodyPr/>
-            <a:lstStyle/>
-            <a:p>
-              <a:endParaRPr lang="en-IN"/>
-            </a:p>
-          </p:txBody>
-        </p:sp>
-      </p:grpSp>
-    </p:spTree>
-  </p:cSld>
-  <p:clrMapOvr>
-    <a:masterClrMapping/>
-  </p:clrMapOvr>
-</p:sld>
-</file>
-
 <file path=ppt/theme/theme1.xml><?xml version="1.0" encoding="utf-8"?>
 <a:theme xmlns:a="http://schemas.openxmlformats.org/drawingml/2006/main" name="Office Theme">
   <a:themeElements>
